--- a/PPT/遊戲平台專題簡報_依建議修正版_修復可開啟.pptx
+++ b/PPT/遊戲平台專題簡報_依建議修正版_修復可開啟.pptx
@@ -4,6 +4,9 @@
   <p:sldMasterIdLst>
     <p:sldMasterId id="2147483648" r:id="rId1"/>
   </p:sldMasterIdLst>
+  <p:notesMasterIdLst>
+    <p:notesMasterId r:id="rId18"/>
+  </p:notesMasterIdLst>
   <p:sldIdLst>
     <p:sldId id="256" r:id="rId2"/>
     <p:sldId id="257" r:id="rId3"/>
@@ -22,11 +25,8 @@
     <p:sldId id="270" r:id="rId16"/>
     <p:sldId id="271" r:id="rId17"/>
   </p:sldIdLst>
-  <p:notesMasterIdLst>
-    <p:notesMasterId r:id="rId18"/>
-  </p:notesMasterIdLst>
-  <p:sldSz cx="12191695" cy="6858000"/>
-  <p:notesSz cx="6858000" cy="12191695"/>
+  <p:sldSz cx="12192000" cy="6858000"/>
+  <p:notesSz cx="6858000" cy="12192000"/>
   <p:defaultTextStyle>
     <a:lvl1pPr marL="0" algn="l" defTabSz="914400" rtl="0" eaLnBrk="1" latinLnBrk="0" hangingPunct="1">
       <a:defRPr sz="1800" kern="1200">
@@ -119,6 +119,11 @@
       </a:defRPr>
     </a:lvl9pPr>
   </p:defaultTextStyle>
+  <p:extLst>
+    <p:ext uri="{EFAFB233-063F-42B5-8137-9DF3F51BA10A}">
+      <p15:sldGuideLst xmlns:p15="http://schemas.microsoft.com/office/powerpoint/2012/main"/>
+    </p:ext>
+  </p:extLst>
 </p:presentation>
 </file>
 
@@ -144,234 +149,10 @@
           <a:chExt cx="0" cy="0"/>
         </a:xfrm>
       </p:grpSpPr>
-      <p:sp>
-        <p:nvSpPr>
-          <p:cNvPr id="2" name="Header Placeholder 1"/>
-          <p:cNvSpPr>
-            <a:spLocks noGrp="1"/>
-          </p:cNvSpPr>
-          <p:nvPr>
-            <p:ph type="hdr" sz="quarter"/>
-          </p:nvPr>
-        </p:nvSpPr>
-        <p:spPr>
-          <a:xfrm>
-            <a:off x="0" y="0"/>
-            <a:ext cx="2971800" cy="458788"/>
-          </a:xfrm>
-          <a:prstGeom prst="rect">
-            <a:avLst/>
-          </a:prstGeom>
-        </p:spPr>
-        <p:txBody>
-          <a:bodyPr vert="horz" lIns="91440" tIns="45720" rIns="91440" bIns="45720" rtlCol="0"/>
-          <a:lstStyle>
-            <a:lvl1pPr algn="l">
-              <a:defRPr sz="1200"/>
-            </a:lvl1pPr>
-          </a:lstStyle>
-          <a:p>
-            <a:endParaRPr lang="en-US"/>
-          </a:p>
-        </p:txBody>
-      </p:sp>
-      <p:sp>
-        <p:nvSpPr>
-          <p:cNvPr id="3" name="Date Placeholder 2"/>
-          <p:cNvSpPr>
-            <a:spLocks noGrp="1"/>
-          </p:cNvSpPr>
-          <p:nvPr>
-            <p:ph type="dt" idx="1"/>
-          </p:nvPr>
-        </p:nvSpPr>
-        <p:spPr>
-          <a:xfrm>
-            <a:off x="3884613" y="0"/>
-            <a:ext cx="2971800" cy="458788"/>
-          </a:xfrm>
-          <a:prstGeom prst="rect">
-            <a:avLst/>
-          </a:prstGeom>
-        </p:spPr>
-        <p:txBody>
-          <a:bodyPr vert="horz" lIns="91440" tIns="45720" rIns="91440" bIns="45720" rtlCol="0"/>
-          <a:lstStyle>
-            <a:lvl1pPr algn="r">
-              <a:defRPr sz="1200"/>
-            </a:lvl1pPr>
-          </a:lstStyle>
-          <a:p>
-            <a:fld id="{5282F153-3F37-0F45-9E97-73ACFA13230C}" type="datetimeFigureOut">
-              <a:rPr lang="en-US"/>
-              <a:t>7/23/19</a:t>
-            </a:fld>
-            <a:endParaRPr lang="en-US"/>
-          </a:p>
-        </p:txBody>
-      </p:sp>
-      <p:sp>
-        <p:nvSpPr>
-          <p:cNvPr id="4" name="Slide Image Placeholder 3"/>
-          <p:cNvSpPr>
-            <a:spLocks noGrp="1" noRot="1" noChangeAspect="1"/>
-          </p:cNvSpPr>
-          <p:nvPr>
-            <p:ph type="sldImg" idx="2"/>
-          </p:nvPr>
-        </p:nvSpPr>
-        <p:spPr>
-          <a:xfrm>
-            <a:off x="685800" y="1143000"/>
-            <a:ext cx="5486400" cy="3086100"/>
-          </a:xfrm>
-          <a:prstGeom prst="rect">
-            <a:avLst/>
-          </a:prstGeom>
-          <a:noFill/>
-          <a:ln w="12700">
-            <a:solidFill>
-              <a:prstClr val="black"/>
-            </a:solidFill>
-          </a:ln>
-        </p:spPr>
-        <p:txBody>
-          <a:bodyPr vert="horz" lIns="91440" tIns="45720" rIns="91440" bIns="45720" rtlCol="0" anchor="ctr"/>
-          <a:lstStyle/>
-          <a:p>
-            <a:endParaRPr lang="en-US"/>
-          </a:p>
-        </p:txBody>
-      </p:sp>
-      <p:sp>
-        <p:nvSpPr>
-          <p:cNvPr id="5" name="Notes Placeholder 4"/>
-          <p:cNvSpPr>
-            <a:spLocks noGrp="1"/>
-          </p:cNvSpPr>
-          <p:nvPr>
-            <p:ph type="body" sz="quarter" idx="3"/>
-          </p:nvPr>
-        </p:nvSpPr>
-        <p:spPr>
-          <a:xfrm>
-            <a:off x="685800" y="4400550"/>
-            <a:ext cx="5486400" cy="3600450"/>
-          </a:xfrm>
-          <a:prstGeom prst="rect">
-            <a:avLst/>
-          </a:prstGeom>
-        </p:spPr>
-        <p:txBody>
-          <a:bodyPr vert="horz" lIns="91440" tIns="45720" rIns="91440" bIns="45720" rtlCol="0"/>
-          <a:lstStyle/>
-          <a:p>
-            <a:pPr lvl="0"/>
-            <a:r>
-              <a:rPr lang="en-US"/>
-              <a:t>Click to edit Master text styles</a:t>
-            </a:r>
-          </a:p>
-          <a:p>
-            <a:pPr lvl="1"/>
-            <a:r>
-              <a:rPr lang="en-US"/>
-              <a:t>Second level</a:t>
-            </a:r>
-          </a:p>
-          <a:p>
-            <a:pPr lvl="2"/>
-            <a:r>
-              <a:rPr lang="en-US"/>
-              <a:t>Third level</a:t>
-            </a:r>
-          </a:p>
-          <a:p>
-            <a:pPr lvl="3"/>
-            <a:r>
-              <a:rPr lang="en-US"/>
-              <a:t>Fourth level</a:t>
-            </a:r>
-          </a:p>
-          <a:p>
-            <a:pPr lvl="4"/>
-            <a:r>
-              <a:rPr lang="en-US"/>
-              <a:t>Fifth level</a:t>
-            </a:r>
-          </a:p>
-        </p:txBody>
-      </p:sp>
-      <p:sp>
-        <p:nvSpPr>
-          <p:cNvPr id="6" name="Footer Placeholder 5"/>
-          <p:cNvSpPr>
-            <a:spLocks noGrp="1"/>
-          </p:cNvSpPr>
-          <p:nvPr>
-            <p:ph type="ftr" sz="quarter" idx="4"/>
-          </p:nvPr>
-        </p:nvSpPr>
-        <p:spPr>
-          <a:xfrm>
-            <a:off x="0" y="8685213"/>
-            <a:ext cx="2971800" cy="458787"/>
-          </a:xfrm>
-          <a:prstGeom prst="rect">
-            <a:avLst/>
-          </a:prstGeom>
-        </p:spPr>
-        <p:txBody>
-          <a:bodyPr vert="horz" lIns="91440" tIns="45720" rIns="91440" bIns="45720" rtlCol="0" anchor="b"/>
-          <a:lstStyle>
-            <a:lvl1pPr algn="l">
-              <a:defRPr sz="1200"/>
-            </a:lvl1pPr>
-          </a:lstStyle>
-          <a:p>
-            <a:endParaRPr lang="en-US"/>
-          </a:p>
-        </p:txBody>
-      </p:sp>
-      <p:sp>
-        <p:nvSpPr>
-          <p:cNvPr id="7" name="Slide Number Placeholder 6"/>
-          <p:cNvSpPr>
-            <a:spLocks noGrp="1"/>
-          </p:cNvSpPr>
-          <p:nvPr>
-            <p:ph type="sldNum" sz="quarter" idx="5"/>
-          </p:nvPr>
-        </p:nvSpPr>
-        <p:spPr>
-          <a:xfrm>
-            <a:off x="3884613" y="8685213"/>
-            <a:ext cx="2971800" cy="458787"/>
-          </a:xfrm>
-          <a:prstGeom prst="rect">
-            <a:avLst/>
-          </a:prstGeom>
-        </p:spPr>
-        <p:txBody>
-          <a:bodyPr vert="horz" lIns="91440" tIns="45720" rIns="91440" bIns="45720" rtlCol="0" anchor="b"/>
-          <a:lstStyle>
-            <a:lvl1pPr algn="r">
-              <a:defRPr sz="1200"/>
-            </a:lvl1pPr>
-          </a:lstStyle>
-          <a:p>
-            <a:fld id="{CE5E9CC1-C706-0F49-92D6-E571CC5EEA8F}" type="slidenum">
-              <a:rPr lang="en-US"/>
-              <a:t>‹#›</a:t>
-            </a:fld>
-            <a:endParaRPr lang="en-US"/>
-          </a:p>
-        </p:txBody>
-      </p:sp>
     </p:spTree>
     <p:extLst>
       <p:ext uri="{BB962C8B-B14F-4D97-AF65-F5344CB8AC3E}">
-        <p14:creationId xmlns:p14="http://schemas.microsoft.com/office/powerpoint/2010/main" val="1024086991"/>
+        <p14:creationId xmlns:p14="http://schemas.microsoft.com/office/powerpoint/2010/main" val="3719594095"/>
       </p:ext>
     </p:extLst>
   </p:cSld>
@@ -519,7 +300,6 @@
               <a:rPr lang="en-US" dirty="0"/>
               <a:t>封面使用實際登入頁，強調這是一個網頁平台作品，而不是單一遊戲畫面。</a:t>
             </a:r>
-            <a:endParaRPr lang="en-US" dirty="0"/>
           </a:p>
         </p:txBody>
       </p:sp>
@@ -607,7 +387,6 @@
               <a:rPr lang="en-US" dirty="0"/>
               <a:t>呈現 Board/Chat 與 Room 的資料銜接，保留必要關係，不塞完整欄位。</a:t>
             </a:r>
-            <a:endParaRPr lang="en-US" dirty="0"/>
           </a:p>
         </p:txBody>
       </p:sp>
@@ -695,7 +474,6 @@
               <a:rPr lang="en-US" dirty="0"/>
               <a:t>修正「Working Product 應為雙向」的表述：使用者操作與後端狀態同步是雙向資料流。</a:t>
             </a:r>
-            <a:endParaRPr lang="en-US" dirty="0"/>
           </a:p>
         </p:txBody>
       </p:sp>
@@ -783,7 +561,6 @@
               <a:rPr lang="en-US" dirty="0"/>
               <a:t>這頁保留實際畫面，但排版改為三連畫面，直接對應使用流程。</a:t>
             </a:r>
-            <a:endParaRPr lang="en-US" dirty="0"/>
           </a:p>
         </p:txBody>
       </p:sp>
@@ -871,7 +648,6 @@
               <a:rPr lang="en-US" dirty="0"/>
               <a:t>使用 Poker 結果頁作為主要證據，說明已完成遊戲核心流程。</a:t>
             </a:r>
-            <a:endParaRPr lang="en-US" dirty="0"/>
           </a:p>
         </p:txBody>
       </p:sp>
@@ -959,7 +735,6 @@
               <a:rPr lang="en-US" dirty="0"/>
               <a:t>依 Round.java 的牌型編號、點數排序與花色權重拆解 handStrength 範例。</a:t>
             </a:r>
-            <a:endParaRPr lang="en-US" dirty="0"/>
           </a:p>
         </p:txBody>
       </p:sp>
@@ -1047,7 +822,6 @@
               <a:rPr lang="en-US" dirty="0"/>
               <a:t>依使用者建議，避免把非展示焦點寫成問題，只呈現驗證成果與展示範圍。</a:t>
             </a:r>
-            <a:endParaRPr lang="en-US" dirty="0"/>
           </a:p>
         </p:txBody>
       </p:sp>
@@ -1135,7 +909,6 @@
               <a:rPr lang="en-US" dirty="0"/>
               <a:t>結尾不做未來擴充，聚焦已完成成果與現場展示。</a:t>
             </a:r>
-            <a:endParaRPr lang="en-US" dirty="0"/>
           </a:p>
         </p:txBody>
       </p:sp>
@@ -1223,7 +996,6 @@
               <a:rPr lang="en-US" dirty="0"/>
               <a:t>以端到端流程開場，避免讓報告看起來像只有 Poker 單一遊戲。</a:t>
             </a:r>
-            <a:endParaRPr lang="en-US" dirty="0"/>
           </a:p>
         </p:txBody>
       </p:sp>
@@ -1311,7 +1083,6 @@
               <a:rPr lang="en-US" dirty="0"/>
               <a:t>本頁直接使用素材資料夾中的完整 UI 使用者流程圖。</a:t>
             </a:r>
-            <a:endParaRPr lang="en-US" dirty="0"/>
           </a:p>
         </p:txBody>
       </p:sp>
@@ -1399,7 +1170,6 @@
               <a:rPr lang="en-US" dirty="0"/>
               <a:t>此頁對應素材建議：主流程更明顯、補上組隊自動建立房間，並區分兩種開房方式。</a:t>
             </a:r>
-            <a:endParaRPr lang="en-US" dirty="0"/>
           </a:p>
         </p:txBody>
       </p:sp>
@@ -1487,7 +1257,6 @@
               <a:rPr lang="en-US" dirty="0"/>
               <a:t>根據素材中的「瀏覽器→Spring Boot→SQLite」與專案樹說明重繪成架構頁。</a:t>
             </a:r>
-            <a:endParaRPr lang="en-US" dirty="0"/>
           </a:p>
         </p:txBody>
       </p:sp>
@@ -1575,7 +1344,6 @@
               <a:rPr lang="en-US" dirty="0"/>
               <a:t>強調模組化架構與責任邊界，不呈現分工。</a:t>
             </a:r>
-            <a:endParaRPr lang="en-US" dirty="0"/>
           </a:p>
         </p:txBody>
       </p:sp>
@@ -1663,7 +1431,6 @@
               <a:rPr lang="en-US" dirty="0"/>
               <a:t>依修改建議將 Authentication Flow 提前，因為登入身分是後續大廳、房間與遊戲的共同基礎。</a:t>
             </a:r>
-            <a:endParaRPr lang="en-US" dirty="0"/>
           </a:p>
         </p:txBody>
       </p:sp>
@@ -1751,7 +1518,6 @@
               <a:rPr lang="en-US" dirty="0"/>
               <a:t>以中文欄位說明替代資料庫欄位名，降低聽眾閱讀負擔。</a:t>
             </a:r>
-            <a:endParaRPr lang="en-US" dirty="0"/>
           </a:p>
         </p:txBody>
       </p:sp>
@@ -1839,7 +1605,6 @@
               <a:rPr lang="en-US" dirty="0"/>
               <a:t>加入 Lobby 說明，並將 Game/GameMode/Room/RoomPlayers 關聯集中呈現。</a:t>
             </a:r>
-            <a:endParaRPr lang="en-US" dirty="0"/>
           </a:p>
         </p:txBody>
       </p:sp>
@@ -1912,6 +1677,11 @@
 <file path=ppt/slideMasters/slideMaster1.xml><?xml version="1.0" encoding="utf-8"?>
 <p:sldMaster xmlns:a="http://schemas.openxmlformats.org/drawingml/2006/main" xmlns:r="http://schemas.openxmlformats.org/officeDocument/2006/relationships" xmlns:p="http://schemas.openxmlformats.org/presentationml/2006/main">
   <p:cSld>
+    <p:bg>
+      <p:bgRef idx="1001">
+        <a:schemeClr val="bg1"/>
+      </p:bgRef>
+    </p:bg>
     <p:spTree>
       <p:nvGrpSpPr>
         <p:cNvPr id="1" name=""/>
@@ -2194,6 +1964,7 @@
         <a:solidFill>
           <a:srgbClr val="0B1220"/>
         </a:solidFill>
+        <a:effectLst/>
       </p:bgPr>
     </p:bg>
     <p:spTree>
@@ -2212,15 +1983,15 @@
       </p:grpSpPr>
       <p:pic>
         <p:nvPicPr>
-          <p:cNvPr id="2" name="Image 0" descr="/mnt/data/gp3/gammPlatform/PPT/screenshots/01-login.png">    </p:cNvPr>
+          <p:cNvPr id="2" name="Image 0" descr="/mnt/data/gp3/gammPlatform/PPT/screenshots/01-login.png"/>
           <p:cNvPicPr>
             <a:picLocks noChangeAspect="1"/>
           </p:cNvPicPr>
           <p:nvPr/>
         </p:nvPicPr>
         <p:blipFill>
-          <a:blip r:embed="rId1"/>
-          <a:srcRect l="24575" r="24575" t="0" b="0"/>
+          <a:blip r:embed="rId3"/>
+          <a:srcRect l="24575" r="24575"/>
           <a:stretch/>
         </p:blipFill>
         <p:spPr>
@@ -2312,7 +2083,7 @@
           </a:bodyPr>
           <a:lstStyle/>
           <a:p>
-            <a:pPr algn="l" indent="0" marL="0">
+            <a:pPr marL="0" indent="0" algn="l">
               <a:buNone/>
             </a:pPr>
             <a:r>
@@ -2353,7 +2124,7 @@
           </a:bodyPr>
           <a:lstStyle/>
           <a:p>
-            <a:pPr algn="l" indent="0" marL="0">
+            <a:pPr marL="0" indent="0" algn="l">
               <a:buNone/>
             </a:pPr>
             <a:r>
@@ -2394,7 +2165,7 @@
           </a:bodyPr>
           <a:lstStyle/>
           <a:p>
-            <a:pPr algn="l" indent="0" marL="0">
+            <a:pPr marL="0" indent="0" algn="l">
               <a:buNone/>
             </a:pPr>
             <a:r>
@@ -2411,7 +2182,7 @@
             <a:endParaRPr lang="en-US" sz="1450" dirty="0"/>
           </a:p>
           <a:p>
-            <a:pPr algn="l" indent="0" marL="0">
+            <a:pPr marL="0" indent="0" algn="l">
               <a:buNone/>
             </a:pPr>
             <a:r>
@@ -2475,7 +2246,7 @@
           </a:bodyPr>
           <a:lstStyle/>
           <a:p>
-            <a:pPr algn="l" indent="0" marL="0">
+            <a:pPr marL="0" indent="0" algn="l">
               <a:buNone/>
             </a:pPr>
             <a:r>
@@ -2543,7 +2314,7 @@
           <a:bodyPr wrap="square" lIns="0" tIns="0" rIns="0" bIns="0" rtlCol="0" anchor="ctr"/>
           <a:lstStyle/>
           <a:p>
-            <a:pPr algn="ctr" indent="0" marL="0">
+            <a:pPr marL="0" indent="0" algn="ctr">
               <a:buNone/>
             </a:pPr>
             <a:r>
@@ -2611,7 +2382,7 @@
           <a:bodyPr wrap="square" lIns="0" tIns="0" rIns="0" bIns="0" rtlCol="0" anchor="ctr"/>
           <a:lstStyle/>
           <a:p>
-            <a:pPr algn="ctr" indent="0" marL="0">
+            <a:pPr marL="0" indent="0" algn="ctr">
               <a:buNone/>
             </a:pPr>
             <a:r>
@@ -2679,7 +2450,7 @@
           <a:bodyPr wrap="square" lIns="0" tIns="0" rIns="0" bIns="0" rtlCol="0" anchor="ctr"/>
           <a:lstStyle/>
           <a:p>
-            <a:pPr algn="ctr" indent="0" marL="0">
+            <a:pPr marL="0" indent="0" algn="ctr">
               <a:buNone/>
             </a:pPr>
             <a:r>
@@ -2747,7 +2518,7 @@
           <a:bodyPr wrap="square" lIns="0" tIns="0" rIns="0" bIns="0" rtlCol="0" anchor="ctr"/>
           <a:lstStyle/>
           <a:p>
-            <a:pPr algn="ctr" indent="0" marL="0">
+            <a:pPr marL="0" indent="0" algn="ctr">
               <a:buNone/>
             </a:pPr>
             <a:r>
@@ -2815,7 +2586,7 @@
           <a:bodyPr wrap="square" lIns="0" tIns="0" rIns="0" bIns="0" rtlCol="0" anchor="ctr"/>
           <a:lstStyle/>
           <a:p>
-            <a:pPr algn="ctr" indent="0" marL="0">
+            <a:pPr marL="0" indent="0" algn="ctr">
               <a:buNone/>
             </a:pPr>
             <a:r>
@@ -2849,6 +2620,7 @@
         <a:solidFill>
           <a:srgbClr val="F7FAFC"/>
         </a:solidFill>
+        <a:effectLst/>
       </p:bgPr>
     </p:bg>
     <p:spTree>
@@ -2971,7 +2743,7 @@
           </a:bodyPr>
           <a:lstStyle/>
           <a:p>
-            <a:pPr algn="l" indent="0" marL="0">
+            <a:pPr marL="0" indent="0" algn="l">
               <a:buNone/>
             </a:pPr>
             <a:r>
@@ -3012,7 +2784,7 @@
           </a:bodyPr>
           <a:lstStyle/>
           <a:p>
-            <a:pPr algn="l" indent="0" marL="0">
+            <a:pPr marL="0" indent="0" algn="l">
               <a:buNone/>
             </a:pPr>
             <a:r>
@@ -3097,7 +2869,7 @@
           <a:bodyPr wrap="square" lIns="0" tIns="0" rIns="0" bIns="0" rtlCol="0" anchor="ctr"/>
           <a:lstStyle/>
           <a:p>
-            <a:pPr indent="0" marL="0">
+            <a:pPr marL="0" indent="0">
               <a:buNone/>
             </a:pPr>
             <a:r>
@@ -3136,7 +2908,7 @@
           <a:bodyPr wrap="square" lIns="0" tIns="0" rIns="0" bIns="0" rtlCol="0" anchor="ctr"/>
           <a:lstStyle/>
           <a:p>
-            <a:pPr algn="r" indent="0" marL="0">
+            <a:pPr marL="0" indent="0" algn="r">
               <a:buNone/>
             </a:pPr>
             <a:r>
@@ -3177,7 +2949,7 @@
           </a:bodyPr>
           <a:lstStyle/>
           <a:p>
-            <a:pPr algn="l" indent="0" marL="0">
+            <a:pPr marL="0" indent="0" algn="l">
               <a:buNone/>
             </a:pPr>
             <a:r>
@@ -3346,7 +3118,7 @@
             <a:prstDash val="solid"/>
           </a:ln>
           <a:effectLst>
-            <a:outerShdw sx="100000" sy="100000" kx="0" ky="0" algn="bl" rotWithShape="0" blurRad="12700" dist="50800" dir="2700000">
+            <a:outerShdw blurRad="12700" dist="50800" dir="2700000" algn="bl" rotWithShape="0">
               <a:srgbClr val="000000">
                 <a:alpha val="12000"/>
               </a:srgbClr>
@@ -3404,7 +3176,7 @@
           </a:bodyPr>
           <a:lstStyle/>
           <a:p>
-            <a:pPr algn="l" indent="0" marL="0">
+            <a:pPr marL="0" indent="0" algn="l">
               <a:buNone/>
             </a:pPr>
             <a:r>
@@ -3445,7 +3217,7 @@
           </a:bodyPr>
           <a:lstStyle/>
           <a:p>
-            <a:pPr algn="l" indent="0" marL="0">
+            <a:pPr marL="0" indent="0" algn="l">
               <a:buNone/>
             </a:pPr>
             <a:r>
@@ -3462,7 +3234,7 @@
             <a:endParaRPr lang="en-US" sz="670" dirty="0"/>
           </a:p>
           <a:p>
-            <a:pPr algn="l" indent="0" marL="0">
+            <a:pPr marL="0" indent="0" algn="l">
               <a:buNone/>
             </a:pPr>
             <a:r>
@@ -3479,7 +3251,7 @@
             <a:endParaRPr lang="en-US" sz="670" dirty="0"/>
           </a:p>
           <a:p>
-            <a:pPr algn="l" indent="0" marL="0">
+            <a:pPr marL="0" indent="0" algn="l">
               <a:buNone/>
             </a:pPr>
             <a:r>
@@ -3523,7 +3295,7 @@
             <a:prstDash val="solid"/>
           </a:ln>
           <a:effectLst>
-            <a:outerShdw sx="100000" sy="100000" kx="0" ky="0" algn="bl" rotWithShape="0" blurRad="12700" dist="50800" dir="2700000">
+            <a:outerShdw blurRad="12700" dist="50800" dir="2700000" algn="bl" rotWithShape="0">
               <a:srgbClr val="000000">
                 <a:alpha val="12000"/>
               </a:srgbClr>
@@ -3581,7 +3353,7 @@
           </a:bodyPr>
           <a:lstStyle/>
           <a:p>
-            <a:pPr algn="l" indent="0" marL="0">
+            <a:pPr marL="0" indent="0" algn="l">
               <a:buNone/>
             </a:pPr>
             <a:r>
@@ -3622,7 +3394,7 @@
           </a:bodyPr>
           <a:lstStyle/>
           <a:p>
-            <a:pPr algn="l" indent="0" marL="0">
+            <a:pPr marL="0" indent="0" algn="l">
               <a:buNone/>
             </a:pPr>
             <a:r>
@@ -3639,7 +3411,7 @@
             <a:endParaRPr lang="en-US" sz="670" dirty="0"/>
           </a:p>
           <a:p>
-            <a:pPr algn="l" indent="0" marL="0">
+            <a:pPr marL="0" indent="0" algn="l">
               <a:buNone/>
             </a:pPr>
             <a:r>
@@ -3656,7 +3428,7 @@
             <a:endParaRPr lang="en-US" sz="670" dirty="0"/>
           </a:p>
           <a:p>
-            <a:pPr algn="l" indent="0" marL="0">
+            <a:pPr marL="0" indent="0" algn="l">
               <a:buNone/>
             </a:pPr>
             <a:r>
@@ -3673,7 +3445,7 @@
             <a:endParaRPr lang="en-US" sz="670" dirty="0"/>
           </a:p>
           <a:p>
-            <a:pPr algn="l" indent="0" marL="0">
+            <a:pPr marL="0" indent="0" algn="l">
               <a:buNone/>
             </a:pPr>
             <a:r>
@@ -3690,7 +3462,7 @@
             <a:endParaRPr lang="en-US" sz="670" dirty="0"/>
           </a:p>
           <a:p>
-            <a:pPr algn="l" indent="0" marL="0">
+            <a:pPr marL="0" indent="0" algn="l">
               <a:buNone/>
             </a:pPr>
             <a:r>
@@ -3734,7 +3506,7 @@
             <a:prstDash val="solid"/>
           </a:ln>
           <a:effectLst>
-            <a:outerShdw sx="100000" sy="100000" kx="0" ky="0" algn="bl" rotWithShape="0" blurRad="12700" dist="50800" dir="2700000">
+            <a:outerShdw blurRad="12700" dist="50800" dir="2700000" algn="bl" rotWithShape="0">
               <a:srgbClr val="000000">
                 <a:alpha val="12000"/>
               </a:srgbClr>
@@ -3792,7 +3564,7 @@
           </a:bodyPr>
           <a:lstStyle/>
           <a:p>
-            <a:pPr algn="l" indent="0" marL="0">
+            <a:pPr marL="0" indent="0" algn="l">
               <a:buNone/>
             </a:pPr>
             <a:r>
@@ -3833,7 +3605,7 @@
           </a:bodyPr>
           <a:lstStyle/>
           <a:p>
-            <a:pPr algn="l" indent="0" marL="0">
+            <a:pPr marL="0" indent="0" algn="l">
               <a:buNone/>
             </a:pPr>
             <a:r>
@@ -3850,7 +3622,7 @@
             <a:endParaRPr lang="en-US" sz="670" dirty="0"/>
           </a:p>
           <a:p>
-            <a:pPr algn="l" indent="0" marL="0">
+            <a:pPr marL="0" indent="0" algn="l">
               <a:buNone/>
             </a:pPr>
             <a:r>
@@ -3867,7 +3639,7 @@
             <a:endParaRPr lang="en-US" sz="670" dirty="0"/>
           </a:p>
           <a:p>
-            <a:pPr algn="l" indent="0" marL="0">
+            <a:pPr marL="0" indent="0" algn="l">
               <a:buNone/>
             </a:pPr>
             <a:r>
@@ -3884,7 +3656,7 @@
             <a:endParaRPr lang="en-US" sz="670" dirty="0"/>
           </a:p>
           <a:p>
-            <a:pPr algn="l" indent="0" marL="0">
+            <a:pPr marL="0" indent="0" algn="l">
               <a:buNone/>
             </a:pPr>
             <a:r>
@@ -3928,7 +3700,7 @@
             <a:prstDash val="solid"/>
           </a:ln>
           <a:effectLst>
-            <a:outerShdw sx="100000" sy="100000" kx="0" ky="0" algn="bl" rotWithShape="0" blurRad="12700" dist="50800" dir="2700000">
+            <a:outerShdw blurRad="12700" dist="50800" dir="2700000" algn="bl" rotWithShape="0">
               <a:srgbClr val="000000">
                 <a:alpha val="12000"/>
               </a:srgbClr>
@@ -3986,7 +3758,7 @@
           </a:bodyPr>
           <a:lstStyle/>
           <a:p>
-            <a:pPr algn="l" indent="0" marL="0">
+            <a:pPr marL="0" indent="0" algn="l">
               <a:buNone/>
             </a:pPr>
             <a:r>
@@ -4027,7 +3799,7 @@
           </a:bodyPr>
           <a:lstStyle/>
           <a:p>
-            <a:pPr algn="l" indent="0" marL="0">
+            <a:pPr marL="0" indent="0" algn="l">
               <a:buNone/>
             </a:pPr>
             <a:r>
@@ -4044,7 +3816,7 @@
             <a:endParaRPr lang="en-US" sz="670" dirty="0"/>
           </a:p>
           <a:p>
-            <a:pPr algn="l" indent="0" marL="0">
+            <a:pPr marL="0" indent="0" algn="l">
               <a:buNone/>
             </a:pPr>
             <a:r>
@@ -4061,7 +3833,7 @@
             <a:endParaRPr lang="en-US" sz="670" dirty="0"/>
           </a:p>
           <a:p>
-            <a:pPr algn="l" indent="0" marL="0">
+            <a:pPr marL="0" indent="0" algn="l">
               <a:buNone/>
             </a:pPr>
             <a:r>
@@ -4078,7 +3850,7 @@
             <a:endParaRPr lang="en-US" sz="670" dirty="0"/>
           </a:p>
           <a:p>
-            <a:pPr algn="l" indent="0" marL="0">
+            <a:pPr marL="0" indent="0" algn="l">
               <a:buNone/>
             </a:pPr>
             <a:r>
@@ -4122,7 +3894,7 @@
             <a:prstDash val="solid"/>
           </a:ln>
           <a:effectLst>
-            <a:outerShdw sx="100000" sy="100000" kx="0" ky="0" algn="bl" rotWithShape="0" blurRad="12700" dist="50800" dir="2700000">
+            <a:outerShdw blurRad="12700" dist="50800" dir="2700000" algn="bl" rotWithShape="0">
               <a:srgbClr val="000000">
                 <a:alpha val="12000"/>
               </a:srgbClr>
@@ -4180,7 +3952,7 @@
           </a:bodyPr>
           <a:lstStyle/>
           <a:p>
-            <a:pPr algn="l" indent="0" marL="0">
+            <a:pPr marL="0" indent="0" algn="l">
               <a:buNone/>
             </a:pPr>
             <a:r>
@@ -4221,7 +3993,7 @@
           </a:bodyPr>
           <a:lstStyle/>
           <a:p>
-            <a:pPr algn="l" indent="0" marL="0">
+            <a:pPr marL="0" indent="0" algn="l">
               <a:buNone/>
             </a:pPr>
             <a:r>
@@ -4238,7 +4010,7 @@
             <a:endParaRPr lang="en-US" sz="670" dirty="0"/>
           </a:p>
           <a:p>
-            <a:pPr algn="l" indent="0" marL="0">
+            <a:pPr marL="0" indent="0" algn="l">
               <a:buNone/>
             </a:pPr>
             <a:r>
@@ -4282,7 +4054,7 @@
             <a:prstDash val="solid"/>
           </a:ln>
           <a:effectLst>
-            <a:outerShdw sx="100000" sy="100000" kx="0" ky="0" algn="bl" rotWithShape="0" blurRad="12700" dist="50800" dir="2700000">
+            <a:outerShdw blurRad="12700" dist="50800" dir="2700000" algn="bl" rotWithShape="0">
               <a:srgbClr val="000000">
                 <a:alpha val="12000"/>
               </a:srgbClr>
@@ -4340,7 +4112,7 @@
           </a:bodyPr>
           <a:lstStyle/>
           <a:p>
-            <a:pPr algn="l" indent="0" marL="0">
+            <a:pPr marL="0" indent="0" algn="l">
               <a:buNone/>
             </a:pPr>
             <a:r>
@@ -4381,7 +4153,7 @@
           </a:bodyPr>
           <a:lstStyle/>
           <a:p>
-            <a:pPr algn="l" indent="0" marL="0">
+            <a:pPr marL="0" indent="0" algn="l">
               <a:buNone/>
             </a:pPr>
             <a:r>
@@ -4398,7 +4170,7 @@
             <a:endParaRPr lang="en-US" sz="670" dirty="0"/>
           </a:p>
           <a:p>
-            <a:pPr algn="l" indent="0" marL="0">
+            <a:pPr marL="0" indent="0" algn="l">
               <a:buNone/>
             </a:pPr>
             <a:r>
@@ -4466,7 +4238,7 @@
           </a:bodyPr>
           <a:lstStyle/>
           <a:p>
-            <a:pPr algn="l" indent="0" marL="0">
+            <a:pPr marL="0" indent="0" algn="l">
               <a:buNone/>
             </a:pPr>
             <a:r>
@@ -4507,7 +4279,7 @@
           </a:bodyPr>
           <a:lstStyle/>
           <a:p>
-            <a:pPr algn="l" indent="0" marL="0">
+            <a:pPr marL="0" indent="0" algn="l">
               <a:buNone/>
             </a:pPr>
             <a:r>
@@ -4541,6 +4313,7 @@
         <a:solidFill>
           <a:srgbClr val="F7FAFC"/>
         </a:solidFill>
+        <a:effectLst/>
       </p:bgPr>
     </p:bg>
     <p:spTree>
@@ -4663,7 +4436,7 @@
           </a:bodyPr>
           <a:lstStyle/>
           <a:p>
-            <a:pPr algn="l" indent="0" marL="0">
+            <a:pPr marL="0" indent="0" algn="l">
               <a:buNone/>
             </a:pPr>
             <a:r>
@@ -4704,7 +4477,7 @@
           </a:bodyPr>
           <a:lstStyle/>
           <a:p>
-            <a:pPr algn="l" indent="0" marL="0">
+            <a:pPr marL="0" indent="0" algn="l">
               <a:buNone/>
             </a:pPr>
             <a:r>
@@ -4789,7 +4562,7 @@
           <a:bodyPr wrap="square" lIns="0" tIns="0" rIns="0" bIns="0" rtlCol="0" anchor="ctr"/>
           <a:lstStyle/>
           <a:p>
-            <a:pPr indent="0" marL="0">
+            <a:pPr marL="0" indent="0">
               <a:buNone/>
             </a:pPr>
             <a:r>
@@ -4828,7 +4601,7 @@
           <a:bodyPr wrap="square" lIns="0" tIns="0" rIns="0" bIns="0" rtlCol="0" anchor="ctr"/>
           <a:lstStyle/>
           <a:p>
-            <a:pPr algn="r" indent="0" marL="0">
+            <a:pPr marL="0" indent="0" algn="r">
               <a:buNone/>
             </a:pPr>
             <a:r>
@@ -4869,7 +4642,7 @@
           </a:bodyPr>
           <a:lstStyle/>
           <a:p>
-            <a:pPr algn="l" indent="0" marL="0">
+            <a:pPr marL="0" indent="0" algn="l">
               <a:buNone/>
             </a:pPr>
             <a:r>
@@ -4937,7 +4710,7 @@
           </a:bodyPr>
           <a:lstStyle/>
           <a:p>
-            <a:pPr algn="l" indent="0" marL="0">
+            <a:pPr marL="0" indent="0" algn="l">
               <a:buNone/>
             </a:pPr>
             <a:r>
@@ -4978,7 +4751,7 @@
           </a:bodyPr>
           <a:lstStyle/>
           <a:p>
-            <a:pPr algn="l" indent="0" marL="0">
+            <a:pPr marL="0" indent="0" algn="l">
               <a:buNone/>
             </a:pPr>
             <a:r>
@@ -5071,7 +4844,7 @@
           </a:bodyPr>
           <a:lstStyle/>
           <a:p>
-            <a:pPr algn="l" indent="0" marL="0">
+            <a:pPr marL="0" indent="0" algn="l">
               <a:buNone/>
             </a:pPr>
             <a:r>
@@ -5112,7 +4885,7 @@
           </a:bodyPr>
           <a:lstStyle/>
           <a:p>
-            <a:pPr algn="l" indent="0" marL="0">
+            <a:pPr marL="0" indent="0" algn="l">
               <a:buNone/>
             </a:pPr>
             <a:r>
@@ -5205,7 +4978,7 @@
           </a:bodyPr>
           <a:lstStyle/>
           <a:p>
-            <a:pPr algn="l" indent="0" marL="0">
+            <a:pPr marL="0" indent="0" algn="l">
               <a:buNone/>
             </a:pPr>
             <a:r>
@@ -5246,7 +5019,7 @@
           </a:bodyPr>
           <a:lstStyle/>
           <a:p>
-            <a:pPr algn="l" indent="0" marL="0">
+            <a:pPr marL="0" indent="0" algn="l">
               <a:buNone/>
             </a:pPr>
             <a:r>
@@ -5339,7 +5112,7 @@
           </a:bodyPr>
           <a:lstStyle/>
           <a:p>
-            <a:pPr algn="l" indent="0" marL="0">
+            <a:pPr marL="0" indent="0" algn="l">
               <a:buNone/>
             </a:pPr>
             <a:r>
@@ -5380,7 +5153,7 @@
           </a:bodyPr>
           <a:lstStyle/>
           <a:p>
-            <a:pPr algn="l" indent="0" marL="0">
+            <a:pPr marL="0" indent="0" algn="l">
               <a:buNone/>
             </a:pPr>
             <a:r>
@@ -5473,7 +5246,7 @@
           </a:bodyPr>
           <a:lstStyle/>
           <a:p>
-            <a:pPr algn="l" indent="0" marL="0">
+            <a:pPr marL="0" indent="0" algn="l">
               <a:buNone/>
             </a:pPr>
             <a:r>
@@ -5514,7 +5287,7 @@
           </a:bodyPr>
           <a:lstStyle/>
           <a:p>
-            <a:pPr algn="l" indent="0" marL="0">
+            <a:pPr marL="0" indent="0" algn="l">
               <a:buNone/>
             </a:pPr>
             <a:r>
@@ -5607,7 +5380,7 @@
           </a:bodyPr>
           <a:lstStyle/>
           <a:p>
-            <a:pPr algn="l" indent="0" marL="0">
+            <a:pPr marL="0" indent="0" algn="l">
               <a:buNone/>
             </a:pPr>
             <a:r>
@@ -5648,7 +5421,7 @@
           </a:bodyPr>
           <a:lstStyle/>
           <a:p>
-            <a:pPr algn="l" indent="0" marL="0">
+            <a:pPr marL="0" indent="0" algn="l">
               <a:buNone/>
             </a:pPr>
             <a:r>
@@ -5716,7 +5489,7 @@
           </a:bodyPr>
           <a:lstStyle/>
           <a:p>
-            <a:pPr algn="l" indent="0" marL="0">
+            <a:pPr marL="0" indent="0" algn="l">
               <a:buNone/>
             </a:pPr>
             <a:r>
@@ -5757,7 +5530,7 @@
           </a:bodyPr>
           <a:lstStyle/>
           <a:p>
-            <a:pPr algn="l" indent="0" marL="0">
+            <a:pPr marL="0" indent="0" algn="l">
               <a:buNone/>
             </a:pPr>
             <a:r>
@@ -5825,7 +5598,7 @@
           </a:bodyPr>
           <a:lstStyle/>
           <a:p>
-            <a:pPr algn="l" indent="0" marL="0">
+            <a:pPr marL="0" indent="0" algn="l">
               <a:buNone/>
             </a:pPr>
             <a:r>
@@ -5866,7 +5639,7 @@
           </a:bodyPr>
           <a:lstStyle/>
           <a:p>
-            <a:pPr algn="l" indent="0" marL="0">
+            <a:pPr marL="0" indent="0" algn="l">
               <a:buNone/>
             </a:pPr>
             <a:r>
@@ -5932,7 +5705,7 @@
           </a:bodyPr>
           <a:lstStyle/>
           <a:p>
-            <a:pPr algn="ctr" indent="0" marL="0">
+            <a:pPr marL="0" indent="0" algn="ctr">
               <a:buNone/>
             </a:pPr>
             <a:r>
@@ -5966,6 +5739,7 @@
         <a:solidFill>
           <a:srgbClr val="F7FAFC"/>
         </a:solidFill>
+        <a:effectLst/>
       </p:bgPr>
     </p:bg>
     <p:spTree>
@@ -6088,7 +5862,7 @@
           </a:bodyPr>
           <a:lstStyle/>
           <a:p>
-            <a:pPr algn="l" indent="0" marL="0">
+            <a:pPr marL="0" indent="0" algn="l">
               <a:buNone/>
             </a:pPr>
             <a:r>
@@ -6129,7 +5903,7 @@
           </a:bodyPr>
           <a:lstStyle/>
           <a:p>
-            <a:pPr algn="l" indent="0" marL="0">
+            <a:pPr marL="0" indent="0" algn="l">
               <a:buNone/>
             </a:pPr>
             <a:r>
@@ -6214,7 +5988,7 @@
           <a:bodyPr wrap="square" lIns="0" tIns="0" rIns="0" bIns="0" rtlCol="0" anchor="ctr"/>
           <a:lstStyle/>
           <a:p>
-            <a:pPr indent="0" marL="0">
+            <a:pPr marL="0" indent="0">
               <a:buNone/>
             </a:pPr>
             <a:r>
@@ -6253,7 +6027,7 @@
           <a:bodyPr wrap="square" lIns="0" tIns="0" rIns="0" bIns="0" rtlCol="0" anchor="ctr"/>
           <a:lstStyle/>
           <a:p>
-            <a:pPr algn="r" indent="0" marL="0">
+            <a:pPr marL="0" indent="0" algn="r">
               <a:buNone/>
             </a:pPr>
             <a:r>
@@ -6294,7 +6068,7 @@
           </a:bodyPr>
           <a:lstStyle/>
           <a:p>
-            <a:pPr algn="l" indent="0" marL="0">
+            <a:pPr marL="0" indent="0" algn="l">
               <a:buNone/>
             </a:pPr>
             <a:r>
@@ -6338,7 +6112,7 @@
             <a:prstDash val="solid"/>
           </a:ln>
           <a:effectLst>
-            <a:outerShdw sx="100000" sy="100000" kx="0" ky="0" algn="bl" rotWithShape="0" blurRad="12700" dist="50800" dir="2700000">
+            <a:outerShdw blurRad="12700" dist="50800" dir="2700000" algn="bl" rotWithShape="0">
               <a:srgbClr val="000000">
                 <a:alpha val="12000"/>
               </a:srgbClr>
@@ -6348,15 +6122,15 @@
       </p:sp>
       <p:pic>
         <p:nvPicPr>
-          <p:cNvPr id="13" name="Image 0" descr="/mnt/data/gp3/gammPlatform/PPT/screenshots/02-game-lobby.png">    </p:cNvPr>
+          <p:cNvPr id="13" name="Image 0" descr="/mnt/data/gp3/gammPlatform/PPT/screenshots/02-game-lobby.png"/>
           <p:cNvPicPr>
             <a:picLocks noChangeAspect="1"/>
           </p:cNvPicPr>
           <p:nvPr/>
         </p:nvPicPr>
         <p:blipFill>
-          <a:blip r:embed="rId1"/>
-          <a:srcRect l="32" r="32" t="0" b="0"/>
+          <a:blip r:embed="rId3"/>
+          <a:srcRect l="32" r="32"/>
           <a:stretch/>
         </p:blipFill>
         <p:spPr>
@@ -6395,7 +6169,7 @@
             <a:prstDash val="solid"/>
           </a:ln>
           <a:effectLst>
-            <a:outerShdw sx="100000" sy="100000" kx="0" ky="0" algn="bl" rotWithShape="0" blurRad="12700" dist="50800" dir="2700000">
+            <a:outerShdw blurRad="12700" dist="50800" dir="2700000" algn="bl" rotWithShape="0">
               <a:srgbClr val="000000">
                 <a:alpha val="12000"/>
               </a:srgbClr>
@@ -6405,15 +6179,15 @@
       </p:sp>
       <p:pic>
         <p:nvPicPr>
-          <p:cNvPr id="15" name="Image 1" descr="/mnt/data/gp3/gammPlatform/PPT/screenshots/05-lobby-create-room.png">    </p:cNvPr>
+          <p:cNvPr id="15" name="Image 1" descr="/mnt/data/gp3/gammPlatform/PPT/screenshots/05-lobby-create-room.png"/>
           <p:cNvPicPr>
             <a:picLocks noChangeAspect="1"/>
           </p:cNvPicPr>
           <p:nvPr/>
         </p:nvPicPr>
         <p:blipFill>
-          <a:blip r:embed="rId2"/>
-          <a:srcRect l="32" r="32" t="0" b="0"/>
+          <a:blip r:embed="rId4"/>
+          <a:srcRect l="32" r="32"/>
           <a:stretch/>
         </p:blipFill>
         <p:spPr>
@@ -6452,7 +6226,7 @@
             <a:prstDash val="solid"/>
           </a:ln>
           <a:effectLst>
-            <a:outerShdw sx="100000" sy="100000" kx="0" ky="0" algn="bl" rotWithShape="0" blurRad="12700" dist="50800" dir="2700000">
+            <a:outerShdw blurRad="12700" dist="50800" dir="2700000" algn="bl" rotWithShape="0">
               <a:srgbClr val="000000">
                 <a:alpha val="12000"/>
               </a:srgbClr>
@@ -6462,15 +6236,15 @@
       </p:sp>
       <p:pic>
         <p:nvPicPr>
-          <p:cNvPr id="17" name="Image 2" descr="/mnt/data/gp3/gammPlatform/PPT/screenshots/06-waiting-room.png">    </p:cNvPr>
+          <p:cNvPr id="17" name="Image 2" descr="/mnt/data/gp3/gammPlatform/PPT/screenshots/06-waiting-room.png"/>
           <p:cNvPicPr>
             <a:picLocks noChangeAspect="1"/>
           </p:cNvPicPr>
           <p:nvPr/>
         </p:nvPicPr>
         <p:blipFill>
-          <a:blip r:embed="rId3"/>
-          <a:srcRect l="32" r="32" t="0" b="0"/>
+          <a:blip r:embed="rId5"/>
+          <a:srcRect l="32" r="32"/>
           <a:stretch/>
         </p:blipFill>
         <p:spPr>
@@ -6506,7 +6280,7 @@
           </a:bodyPr>
           <a:lstStyle/>
           <a:p>
-            <a:pPr algn="l" indent="0" marL="0">
+            <a:pPr marL="0" indent="0" algn="l">
               <a:buNone/>
             </a:pPr>
             <a:r>
@@ -6547,7 +6321,7 @@
           </a:bodyPr>
           <a:lstStyle/>
           <a:p>
-            <a:pPr algn="l" indent="0" marL="0">
+            <a:pPr marL="0" indent="0" algn="l">
               <a:buNone/>
             </a:pPr>
             <a:r>
@@ -6588,7 +6362,7 @@
           </a:bodyPr>
           <a:lstStyle/>
           <a:p>
-            <a:pPr algn="l" indent="0" marL="0">
+            <a:pPr marL="0" indent="0" algn="l">
               <a:buNone/>
             </a:pPr>
             <a:r>
@@ -6629,7 +6403,7 @@
           </a:bodyPr>
           <a:lstStyle/>
           <a:p>
-            <a:pPr algn="l" indent="0" marL="0">
+            <a:pPr marL="0" indent="0" algn="l">
               <a:buNone/>
             </a:pPr>
             <a:r>
@@ -6670,7 +6444,7 @@
           </a:bodyPr>
           <a:lstStyle/>
           <a:p>
-            <a:pPr algn="l" indent="0" marL="0">
+            <a:pPr marL="0" indent="0" algn="l">
               <a:buNone/>
             </a:pPr>
             <a:r>
@@ -6711,7 +6485,7 @@
           </a:bodyPr>
           <a:lstStyle/>
           <a:p>
-            <a:pPr algn="l" indent="0" marL="0">
+            <a:pPr marL="0" indent="0" algn="l">
               <a:buNone/>
             </a:pPr>
             <a:r>
@@ -6779,7 +6553,7 @@
           </a:bodyPr>
           <a:lstStyle/>
           <a:p>
-            <a:pPr algn="ctr" indent="0" marL="0">
+            <a:pPr marL="0" indent="0" algn="ctr">
               <a:buNone/>
             </a:pPr>
             <a:r>
@@ -6813,6 +6587,7 @@
         <a:solidFill>
           <a:srgbClr val="F7FAFC"/>
         </a:solidFill>
+        <a:effectLst/>
       </p:bgPr>
     </p:bg>
     <p:spTree>
@@ -6935,7 +6710,7 @@
           </a:bodyPr>
           <a:lstStyle/>
           <a:p>
-            <a:pPr algn="l" indent="0" marL="0">
+            <a:pPr marL="0" indent="0" algn="l">
               <a:buNone/>
             </a:pPr>
             <a:r>
@@ -6976,7 +6751,7 @@
           </a:bodyPr>
           <a:lstStyle/>
           <a:p>
-            <a:pPr algn="l" indent="0" marL="0">
+            <a:pPr marL="0" indent="0" algn="l">
               <a:buNone/>
             </a:pPr>
             <a:r>
@@ -7061,7 +6836,7 @@
           <a:bodyPr wrap="square" lIns="0" tIns="0" rIns="0" bIns="0" rtlCol="0" anchor="ctr"/>
           <a:lstStyle/>
           <a:p>
-            <a:pPr indent="0" marL="0">
+            <a:pPr marL="0" indent="0">
               <a:buNone/>
             </a:pPr>
             <a:r>
@@ -7100,7 +6875,7 @@
           <a:bodyPr wrap="square" lIns="0" tIns="0" rIns="0" bIns="0" rtlCol="0" anchor="ctr"/>
           <a:lstStyle/>
           <a:p>
-            <a:pPr algn="r" indent="0" marL="0">
+            <a:pPr marL="0" indent="0" algn="r">
               <a:buNone/>
             </a:pPr>
             <a:r>
@@ -7141,7 +6916,7 @@
           </a:bodyPr>
           <a:lstStyle/>
           <a:p>
-            <a:pPr algn="l" indent="0" marL="0">
+            <a:pPr marL="0" indent="0" algn="l">
               <a:buNone/>
             </a:pPr>
             <a:r>
@@ -7185,7 +6960,7 @@
             <a:prstDash val="solid"/>
           </a:ln>
           <a:effectLst>
-            <a:outerShdw sx="100000" sy="100000" kx="0" ky="0" algn="bl" rotWithShape="0" blurRad="12700" dist="50800" dir="2700000">
+            <a:outerShdw blurRad="12700" dist="50800" dir="2700000" algn="bl" rotWithShape="0">
               <a:srgbClr val="000000">
                 <a:alpha val="12000"/>
               </a:srgbClr>
@@ -7195,15 +6970,15 @@
       </p:sp>
       <p:pic>
         <p:nvPicPr>
-          <p:cNvPr id="13" name="Image 0" descr="/mnt/data/gp3/gammPlatform/PPT/screenshots/09-poker-result.png">    </p:cNvPr>
+          <p:cNvPr id="13" name="Image 0" descr="/mnt/data/gp3/gammPlatform/PPT/screenshots/09-poker-result.png"/>
           <p:cNvPicPr>
             <a:picLocks noChangeAspect="1"/>
           </p:cNvPicPr>
           <p:nvPr/>
         </p:nvPicPr>
         <p:blipFill>
-          <a:blip r:embed="rId1"/>
-          <a:srcRect l="34" r="34" t="0" b="0"/>
+          <a:blip r:embed="rId3"/>
+          <a:srcRect l="34" r="34"/>
           <a:stretch/>
         </p:blipFill>
         <p:spPr>
@@ -7242,7 +7017,7 @@
             <a:prstDash val="solid"/>
           </a:ln>
           <a:effectLst>
-            <a:outerShdw sx="100000" sy="100000" kx="0" ky="0" algn="bl" rotWithShape="0" blurRad="12700" dist="50800" dir="2700000">
+            <a:outerShdw blurRad="12700" dist="50800" dir="2700000" algn="bl" rotWithShape="0">
               <a:srgbClr val="000000">
                 <a:alpha val="12000"/>
               </a:srgbClr>
@@ -7273,7 +7048,7 @@
           </a:bodyPr>
           <a:lstStyle/>
           <a:p>
-            <a:pPr algn="l" indent="0" marL="0">
+            <a:pPr marL="0" indent="0" algn="l">
               <a:buNone/>
             </a:pPr>
             <a:r>
@@ -7314,7 +7089,7 @@
           </a:bodyPr>
           <a:lstStyle/>
           <a:p>
-            <a:pPr algn="l" indent="0" marL="0">
+            <a:pPr marL="0" indent="0" algn="l">
               <a:buNone/>
             </a:pPr>
             <a:r>
@@ -7358,7 +7133,7 @@
             <a:prstDash val="solid"/>
           </a:ln>
           <a:effectLst>
-            <a:outerShdw sx="100000" sy="100000" kx="0" ky="0" algn="bl" rotWithShape="0" blurRad="12700" dist="50800" dir="2700000">
+            <a:outerShdw blurRad="12700" dist="50800" dir="2700000" algn="bl" rotWithShape="0">
               <a:srgbClr val="000000">
                 <a:alpha val="12000"/>
               </a:srgbClr>
@@ -7389,7 +7164,7 @@
           </a:bodyPr>
           <a:lstStyle/>
           <a:p>
-            <a:pPr algn="l" indent="0" marL="0">
+            <a:pPr marL="0" indent="0" algn="l">
               <a:buNone/>
             </a:pPr>
             <a:r>
@@ -7430,7 +7205,7 @@
           </a:bodyPr>
           <a:lstStyle/>
           <a:p>
-            <a:pPr algn="l" indent="0" marL="0">
+            <a:pPr marL="0" indent="0" algn="l">
               <a:buNone/>
             </a:pPr>
             <a:r>
@@ -7474,7 +7249,7 @@
             <a:prstDash val="solid"/>
           </a:ln>
           <a:effectLst>
-            <a:outerShdw sx="100000" sy="100000" kx="0" ky="0" algn="bl" rotWithShape="0" blurRad="12700" dist="50800" dir="2700000">
+            <a:outerShdw blurRad="12700" dist="50800" dir="2700000" algn="bl" rotWithShape="0">
               <a:srgbClr val="000000">
                 <a:alpha val="12000"/>
               </a:srgbClr>
@@ -7505,7 +7280,7 @@
           </a:bodyPr>
           <a:lstStyle/>
           <a:p>
-            <a:pPr algn="l" indent="0" marL="0">
+            <a:pPr marL="0" indent="0" algn="l">
               <a:buNone/>
             </a:pPr>
             <a:r>
@@ -7546,7 +7321,7 @@
           </a:bodyPr>
           <a:lstStyle/>
           <a:p>
-            <a:pPr algn="l" indent="0" marL="0">
+            <a:pPr marL="0" indent="0" algn="l">
               <a:buNone/>
             </a:pPr>
             <a:r>
@@ -7590,7 +7365,7 @@
             <a:prstDash val="solid"/>
           </a:ln>
           <a:effectLst>
-            <a:outerShdw sx="100000" sy="100000" kx="0" ky="0" algn="bl" rotWithShape="0" blurRad="12700" dist="50800" dir="2700000">
+            <a:outerShdw blurRad="12700" dist="50800" dir="2700000" algn="bl" rotWithShape="0">
               <a:srgbClr val="000000">
                 <a:alpha val="12000"/>
               </a:srgbClr>
@@ -7621,7 +7396,7 @@
           </a:bodyPr>
           <a:lstStyle/>
           <a:p>
-            <a:pPr algn="l" indent="0" marL="0">
+            <a:pPr marL="0" indent="0" algn="l">
               <a:buNone/>
             </a:pPr>
             <a:r>
@@ -7662,7 +7437,7 @@
           </a:bodyPr>
           <a:lstStyle/>
           <a:p>
-            <a:pPr algn="l" indent="0" marL="0">
+            <a:pPr marL="0" indent="0" algn="l">
               <a:buNone/>
             </a:pPr>
             <a:r>
@@ -7696,6 +7471,7 @@
         <a:solidFill>
           <a:srgbClr val="F7FAFC"/>
         </a:solidFill>
+        <a:effectLst/>
       </p:bgPr>
     </p:bg>
     <p:spTree>
@@ -7818,7 +7594,7 @@
           </a:bodyPr>
           <a:lstStyle/>
           <a:p>
-            <a:pPr algn="l" indent="0" marL="0">
+            <a:pPr marL="0" indent="0" algn="l">
               <a:buNone/>
             </a:pPr>
             <a:r>
@@ -7859,7 +7635,7 @@
           </a:bodyPr>
           <a:lstStyle/>
           <a:p>
-            <a:pPr algn="l" indent="0" marL="0">
+            <a:pPr marL="0" indent="0" algn="l">
               <a:buNone/>
             </a:pPr>
             <a:r>
@@ -7944,7 +7720,7 @@
           <a:bodyPr wrap="square" lIns="0" tIns="0" rIns="0" bIns="0" rtlCol="0" anchor="ctr"/>
           <a:lstStyle/>
           <a:p>
-            <a:pPr indent="0" marL="0">
+            <a:pPr marL="0" indent="0">
               <a:buNone/>
             </a:pPr>
             <a:r>
@@ -7983,7 +7759,7 @@
           <a:bodyPr wrap="square" lIns="0" tIns="0" rIns="0" bIns="0" rtlCol="0" anchor="ctr"/>
           <a:lstStyle/>
           <a:p>
-            <a:pPr algn="r" indent="0" marL="0">
+            <a:pPr marL="0" indent="0" algn="r">
               <a:buNone/>
             </a:pPr>
             <a:r>
@@ -8024,7 +7800,7 @@
           </a:bodyPr>
           <a:lstStyle/>
           <a:p>
-            <a:pPr algn="l" indent="0" marL="0">
+            <a:pPr marL="0" indent="0" algn="l">
               <a:buNone/>
             </a:pPr>
             <a:r>
@@ -8044,55 +7820,7 @@
       </p:sp>
       <p:pic>
         <p:nvPicPr>
-          <p:cNvPr id="12" name="Image 0" descr="/mnt/data/gp3/gammPlatform/backend/src/main/resources/static/assets/Games/poker/cards/card_a_d2.png">    </p:cNvPr>
-          <p:cNvPicPr>
-            <a:picLocks noChangeAspect="1"/>
-          </p:cNvPicPr>
-          <p:nvPr/>
-        </p:nvPicPr>
-        <p:blipFill>
-          <a:blip r:embed="rId1"/>
-          <a:stretch>
-            <a:fillRect/>
-          </a:stretch>
-        </p:blipFill>
-        <p:spPr>
-          <a:xfrm>
-            <a:off x="927675" y="1901952"/>
-            <a:ext cx="503802" cy="731520"/>
-          </a:xfrm>
-          <a:prstGeom prst="rect">
-            <a:avLst/>
-          </a:prstGeom>
-        </p:spPr>
-      </p:pic>
-      <p:pic>
-        <p:nvPicPr>
-          <p:cNvPr id="13" name="Image 1" descr="/mnt/data/gp3/gammPlatform/backend/src/main/resources/static/assets/Games/poker/cards/card_a_d6.png">    </p:cNvPr>
-          <p:cNvPicPr>
-            <a:picLocks noChangeAspect="1"/>
-          </p:cNvPicPr>
-          <p:nvPr/>
-        </p:nvPicPr>
-        <p:blipFill>
-          <a:blip r:embed="rId2"/>
-          <a:stretch>
-            <a:fillRect/>
-          </a:stretch>
-        </p:blipFill>
-        <p:spPr>
-          <a:xfrm>
-            <a:off x="1531179" y="1901952"/>
-            <a:ext cx="503802" cy="731520"/>
-          </a:xfrm>
-          <a:prstGeom prst="rect">
-            <a:avLst/>
-          </a:prstGeom>
-        </p:spPr>
-      </p:pic>
-      <p:pic>
-        <p:nvPicPr>
-          <p:cNvPr id="14" name="Image 2" descr="/mnt/data/gp3/gammPlatform/backend/src/main/resources/static/assets/Games/poker/cards/card_a_d8.png">    </p:cNvPr>
+          <p:cNvPr id="12" name="Image 0" descr="/mnt/data/gp3/gammPlatform/backend/src/main/resources/static/assets/Games/poker/cards/card_a_d2.png"/>
           <p:cNvPicPr>
             <a:picLocks noChangeAspect="1"/>
           </p:cNvPicPr>
@@ -8106,7 +7834,7 @@
         </p:blipFill>
         <p:spPr>
           <a:xfrm>
-            <a:off x="2134683" y="1901952"/>
+            <a:off x="927675" y="1901952"/>
             <a:ext cx="503802" cy="731520"/>
           </a:xfrm>
           <a:prstGeom prst="rect">
@@ -8116,7 +7844,7 @@
       </p:pic>
       <p:pic>
         <p:nvPicPr>
-          <p:cNvPr id="15" name="Image 3" descr="/mnt/data/gp3/gammPlatform/backend/src/main/resources/static/assets/Games/poker/cards/card_a_d9.png">    </p:cNvPr>
+          <p:cNvPr id="13" name="Image 1" descr="/mnt/data/gp3/gammPlatform/backend/src/main/resources/static/assets/Games/poker/cards/card_a_d6.png"/>
           <p:cNvPicPr>
             <a:picLocks noChangeAspect="1"/>
           </p:cNvPicPr>
@@ -8130,7 +7858,7 @@
         </p:blipFill>
         <p:spPr>
           <a:xfrm>
-            <a:off x="2738187" y="1901952"/>
+            <a:off x="1531179" y="1901952"/>
             <a:ext cx="503802" cy="731520"/>
           </a:xfrm>
           <a:prstGeom prst="rect">
@@ -8140,7 +7868,7 @@
       </p:pic>
       <p:pic>
         <p:nvPicPr>
-          <p:cNvPr id="16" name="Image 4" descr="/mnt/data/gp3/gammPlatform/backend/src/main/resources/static/assets/Games/poker/cards/card_a_dk.png">    </p:cNvPr>
+          <p:cNvPr id="14" name="Image 2" descr="/mnt/data/gp3/gammPlatform/backend/src/main/resources/static/assets/Games/poker/cards/card_a_d8.png"/>
           <p:cNvPicPr>
             <a:picLocks noChangeAspect="1"/>
           </p:cNvPicPr>
@@ -8154,6 +7882,54 @@
         </p:blipFill>
         <p:spPr>
           <a:xfrm>
+            <a:off x="2134683" y="1901952"/>
+            <a:ext cx="503802" cy="731520"/>
+          </a:xfrm>
+          <a:prstGeom prst="rect">
+            <a:avLst/>
+          </a:prstGeom>
+        </p:spPr>
+      </p:pic>
+      <p:pic>
+        <p:nvPicPr>
+          <p:cNvPr id="15" name="Image 3" descr="/mnt/data/gp3/gammPlatform/backend/src/main/resources/static/assets/Games/poker/cards/card_a_d9.png"/>
+          <p:cNvPicPr>
+            <a:picLocks noChangeAspect="1"/>
+          </p:cNvPicPr>
+          <p:nvPr/>
+        </p:nvPicPr>
+        <p:blipFill>
+          <a:blip r:embed="rId6"/>
+          <a:stretch>
+            <a:fillRect/>
+          </a:stretch>
+        </p:blipFill>
+        <p:spPr>
+          <a:xfrm>
+            <a:off x="2738187" y="1901952"/>
+            <a:ext cx="503802" cy="731520"/>
+          </a:xfrm>
+          <a:prstGeom prst="rect">
+            <a:avLst/>
+          </a:prstGeom>
+        </p:spPr>
+      </p:pic>
+      <p:pic>
+        <p:nvPicPr>
+          <p:cNvPr id="16" name="Image 4" descr="/mnt/data/gp3/gammPlatform/backend/src/main/resources/static/assets/Games/poker/cards/card_a_dk.png"/>
+          <p:cNvPicPr>
+            <a:picLocks noChangeAspect="1"/>
+          </p:cNvPicPr>
+          <p:nvPr/>
+        </p:nvPicPr>
+        <p:blipFill>
+          <a:blip r:embed="rId7"/>
+          <a:stretch>
+            <a:fillRect/>
+          </a:stretch>
+        </p:blipFill>
+        <p:spPr>
+          <a:xfrm>
             <a:off x="3341691" y="1901952"/>
             <a:ext cx="503802" cy="731520"/>
           </a:xfrm>
@@ -8185,7 +7961,7 @@
           </a:bodyPr>
           <a:lstStyle/>
           <a:p>
-            <a:pPr algn="l" indent="0" marL="0">
+            <a:pPr marL="0" indent="0" algn="l">
               <a:buNone/>
             </a:pPr>
             <a:r>
@@ -8229,7 +8005,7 @@
             <a:prstDash val="solid"/>
           </a:ln>
           <a:effectLst>
-            <a:outerShdw sx="100000" sy="100000" kx="0" ky="0" algn="bl" rotWithShape="0" blurRad="12700" dist="50800" dir="2700000">
+            <a:outerShdw blurRad="12700" dist="50800" dir="2700000" algn="bl" rotWithShape="0">
               <a:srgbClr val="000000">
                 <a:alpha val="12000"/>
               </a:srgbClr>
@@ -8260,7 +8036,7 @@
           </a:bodyPr>
           <a:lstStyle/>
           <a:p>
-            <a:pPr algn="l" indent="0" marL="0">
+            <a:pPr marL="0" indent="0" algn="l">
               <a:buNone/>
             </a:pPr>
             <a:r>
@@ -8301,7 +8077,7 @@
           </a:bodyPr>
           <a:lstStyle/>
           <a:p>
-            <a:pPr algn="l" indent="0" marL="0">
+            <a:pPr marL="0" indent="0" algn="l">
               <a:buNone/>
             </a:pPr>
             <a:r>
@@ -8342,7 +8118,7 @@
           </a:bodyPr>
           <a:lstStyle/>
           <a:p>
-            <a:pPr algn="l" indent="0" marL="0">
+            <a:pPr marL="0" indent="0" algn="l">
               <a:buNone/>
             </a:pPr>
             <a:r>
@@ -8386,7 +8162,7 @@
             <a:prstDash val="solid"/>
           </a:ln>
           <a:effectLst>
-            <a:outerShdw sx="100000" sy="100000" kx="0" ky="0" algn="bl" rotWithShape="0" blurRad="12700" dist="50800" dir="2700000">
+            <a:outerShdw blurRad="12700" dist="50800" dir="2700000" algn="bl" rotWithShape="0">
               <a:srgbClr val="000000">
                 <a:alpha val="12000"/>
               </a:srgbClr>
@@ -8444,7 +8220,7 @@
           </a:bodyPr>
           <a:lstStyle/>
           <a:p>
-            <a:pPr algn="l" indent="0" marL="0">
+            <a:pPr marL="0" indent="0" algn="l">
               <a:buNone/>
             </a:pPr>
             <a:r>
@@ -8485,7 +8261,7 @@
           </a:bodyPr>
           <a:lstStyle/>
           <a:p>
-            <a:pPr algn="l" indent="0" marL="0">
+            <a:pPr marL="0" indent="0" algn="l">
               <a:buNone/>
             </a:pPr>
             <a:r>
@@ -8502,7 +8278,7 @@
             <a:endParaRPr lang="en-US" sz="670" dirty="0"/>
           </a:p>
           <a:p>
-            <a:pPr algn="l" indent="0" marL="0">
+            <a:pPr marL="0" indent="0" algn="l">
               <a:buNone/>
             </a:pPr>
             <a:r>
@@ -8519,7 +8295,7 @@
             <a:endParaRPr lang="en-US" sz="670" dirty="0"/>
           </a:p>
           <a:p>
-            <a:pPr algn="l" indent="0" marL="0">
+            <a:pPr marL="0" indent="0" algn="l">
               <a:buNone/>
             </a:pPr>
             <a:r>
@@ -8536,7 +8312,7 @@
             <a:endParaRPr lang="en-US" sz="670" dirty="0"/>
           </a:p>
           <a:p>
-            <a:pPr algn="l" indent="0" marL="0">
+            <a:pPr marL="0" indent="0" algn="l">
               <a:buNone/>
             </a:pPr>
             <a:r>
@@ -8553,7 +8329,7 @@
             <a:endParaRPr lang="en-US" sz="670" dirty="0"/>
           </a:p>
           <a:p>
-            <a:pPr algn="l" indent="0" marL="0">
+            <a:pPr marL="0" indent="0" algn="l">
               <a:buNone/>
             </a:pPr>
             <a:r>
@@ -8597,7 +8373,7 @@
             <a:prstDash val="solid"/>
           </a:ln>
           <a:effectLst>
-            <a:outerShdw sx="100000" sy="100000" kx="0" ky="0" algn="bl" rotWithShape="0" blurRad="12700" dist="50800" dir="2700000">
+            <a:outerShdw blurRad="12700" dist="50800" dir="2700000" algn="bl" rotWithShape="0">
               <a:srgbClr val="000000">
                 <a:alpha val="12000"/>
               </a:srgbClr>
@@ -8655,7 +8431,7 @@
           </a:bodyPr>
           <a:lstStyle/>
           <a:p>
-            <a:pPr algn="l" indent="0" marL="0">
+            <a:pPr marL="0" indent="0" algn="l">
               <a:buNone/>
             </a:pPr>
             <a:r>
@@ -8696,7 +8472,7 @@
           </a:bodyPr>
           <a:lstStyle/>
           <a:p>
-            <a:pPr algn="l" indent="0" marL="0">
+            <a:pPr marL="0" indent="0" algn="l">
               <a:buNone/>
             </a:pPr>
             <a:r>
@@ -8713,7 +8489,7 @@
             <a:endParaRPr lang="en-US" sz="670" dirty="0"/>
           </a:p>
           <a:p>
-            <a:pPr algn="l" indent="0" marL="0">
+            <a:pPr marL="0" indent="0" algn="l">
               <a:buNone/>
             </a:pPr>
             <a:r>
@@ -8730,7 +8506,7 @@
             <a:endParaRPr lang="en-US" sz="670" dirty="0"/>
           </a:p>
           <a:p>
-            <a:pPr algn="l" indent="0" marL="0">
+            <a:pPr marL="0" indent="0" algn="l">
               <a:buNone/>
             </a:pPr>
             <a:r>
@@ -8747,7 +8523,7 @@
             <a:endParaRPr lang="en-US" sz="670" dirty="0"/>
           </a:p>
           <a:p>
-            <a:pPr algn="l" indent="0" marL="0">
+            <a:pPr marL="0" indent="0" algn="l">
               <a:buNone/>
             </a:pPr>
             <a:r>
@@ -8791,7 +8567,7 @@
             <a:prstDash val="solid"/>
           </a:ln>
           <a:effectLst>
-            <a:outerShdw sx="100000" sy="100000" kx="0" ky="0" algn="bl" rotWithShape="0" blurRad="12700" dist="50800" dir="2700000">
+            <a:outerShdw blurRad="12700" dist="50800" dir="2700000" algn="bl" rotWithShape="0">
               <a:srgbClr val="000000">
                 <a:alpha val="12000"/>
               </a:srgbClr>
@@ -8849,7 +8625,7 @@
           </a:bodyPr>
           <a:lstStyle/>
           <a:p>
-            <a:pPr algn="l" indent="0" marL="0">
+            <a:pPr marL="0" indent="0" algn="l">
               <a:buNone/>
             </a:pPr>
             <a:r>
@@ -8890,7 +8666,7 @@
           </a:bodyPr>
           <a:lstStyle/>
           <a:p>
-            <a:pPr algn="l" indent="0" marL="0">
+            <a:pPr marL="0" indent="0" algn="l">
               <a:buNone/>
             </a:pPr>
             <a:r>
@@ -8907,7 +8683,7 @@
             <a:endParaRPr lang="en-US" sz="670" dirty="0"/>
           </a:p>
           <a:p>
-            <a:pPr algn="l" indent="0" marL="0">
+            <a:pPr marL="0" indent="0" algn="l">
               <a:buNone/>
             </a:pPr>
             <a:r>
@@ -8924,7 +8700,7 @@
             <a:endParaRPr lang="en-US" sz="670" dirty="0"/>
           </a:p>
           <a:p>
-            <a:pPr algn="l" indent="0" marL="0">
+            <a:pPr marL="0" indent="0" algn="l">
               <a:buNone/>
             </a:pPr>
             <a:r>
@@ -8941,7 +8717,7 @@
             <a:endParaRPr lang="en-US" sz="670" dirty="0"/>
           </a:p>
           <a:p>
-            <a:pPr algn="l" indent="0" marL="0">
+            <a:pPr marL="0" indent="0" algn="l">
               <a:buNone/>
             </a:pPr>
             <a:r>
@@ -8975,6 +8751,7 @@
         <a:solidFill>
           <a:srgbClr val="F7FAFC"/>
         </a:solidFill>
+        <a:effectLst/>
       </p:bgPr>
     </p:bg>
     <p:spTree>
@@ -9097,7 +8874,7 @@
           </a:bodyPr>
           <a:lstStyle/>
           <a:p>
-            <a:pPr algn="l" indent="0" marL="0">
+            <a:pPr marL="0" indent="0" algn="l">
               <a:buNone/>
             </a:pPr>
             <a:r>
@@ -9138,7 +8915,7 @@
           </a:bodyPr>
           <a:lstStyle/>
           <a:p>
-            <a:pPr algn="l" indent="0" marL="0">
+            <a:pPr marL="0" indent="0" algn="l">
               <a:buNone/>
             </a:pPr>
             <a:r>
@@ -9223,7 +9000,7 @@
           <a:bodyPr wrap="square" lIns="0" tIns="0" rIns="0" bIns="0" rtlCol="0" anchor="ctr"/>
           <a:lstStyle/>
           <a:p>
-            <a:pPr indent="0" marL="0">
+            <a:pPr marL="0" indent="0">
               <a:buNone/>
             </a:pPr>
             <a:r>
@@ -9262,7 +9039,7 @@
           <a:bodyPr wrap="square" lIns="0" tIns="0" rIns="0" bIns="0" rtlCol="0" anchor="ctr"/>
           <a:lstStyle/>
           <a:p>
-            <a:pPr algn="r" indent="0" marL="0">
+            <a:pPr marL="0" indent="0" algn="r">
               <a:buNone/>
             </a:pPr>
             <a:r>
@@ -9303,7 +9080,7 @@
           </a:bodyPr>
           <a:lstStyle/>
           <a:p>
-            <a:pPr algn="l" indent="0" marL="0">
+            <a:pPr marL="0" indent="0" algn="l">
               <a:buNone/>
             </a:pPr>
             <a:r>
@@ -9347,7 +9124,7 @@
             <a:prstDash val="solid"/>
           </a:ln>
           <a:effectLst>
-            <a:outerShdw sx="100000" sy="100000" kx="0" ky="0" algn="bl" rotWithShape="0" blurRad="12700" dist="50800" dir="2700000">
+            <a:outerShdw blurRad="12700" dist="50800" dir="2700000" algn="bl" rotWithShape="0">
               <a:srgbClr val="000000">
                 <a:alpha val="12000"/>
               </a:srgbClr>
@@ -9378,7 +9155,7 @@
           </a:bodyPr>
           <a:lstStyle/>
           <a:p>
-            <a:pPr algn="l" indent="0" marL="0">
+            <a:pPr marL="0" indent="0" algn="l">
               <a:buNone/>
             </a:pPr>
             <a:r>
@@ -9419,7 +9196,7 @@
           </a:bodyPr>
           <a:lstStyle/>
           <a:p>
-            <a:pPr algn="l" indent="0" marL="0">
+            <a:pPr marL="0" indent="0" algn="l">
               <a:buNone/>
             </a:pPr>
             <a:r>
@@ -9460,7 +9237,7 @@
           </a:bodyPr>
           <a:lstStyle/>
           <a:p>
-            <a:pPr algn="l" indent="0" marL="0">
+            <a:pPr marL="0" indent="0" algn="l">
               <a:buNone/>
             </a:pPr>
             <a:r>
@@ -9477,7 +9254,7 @@
             <a:endParaRPr lang="en-US" sz="720" dirty="0"/>
           </a:p>
           <a:p>
-            <a:pPr algn="l" indent="0" marL="0">
+            <a:pPr marL="0" indent="0" algn="l">
               <a:buNone/>
             </a:pPr>
             <a:r>
@@ -9521,7 +9298,7 @@
             <a:prstDash val="solid"/>
           </a:ln>
           <a:effectLst>
-            <a:outerShdw sx="100000" sy="100000" kx="0" ky="0" algn="bl" rotWithShape="0" blurRad="12700" dist="50800" dir="2700000">
+            <a:outerShdw blurRad="12700" dist="50800" dir="2700000" algn="bl" rotWithShape="0">
               <a:srgbClr val="000000">
                 <a:alpha val="12000"/>
               </a:srgbClr>
@@ -9552,7 +9329,7 @@
           </a:bodyPr>
           <a:lstStyle/>
           <a:p>
-            <a:pPr algn="l" indent="0" marL="0">
+            <a:pPr marL="0" indent="0" algn="l">
               <a:buNone/>
             </a:pPr>
             <a:r>
@@ -9593,7 +9370,7 @@
           </a:bodyPr>
           <a:lstStyle/>
           <a:p>
-            <a:pPr algn="l" indent="0" marL="0">
+            <a:pPr marL="0" indent="0" algn="l">
               <a:buNone/>
             </a:pPr>
             <a:r>
@@ -9634,7 +9411,7 @@
           </a:bodyPr>
           <a:lstStyle/>
           <a:p>
-            <a:pPr algn="l" indent="0" marL="0">
+            <a:pPr marL="0" indent="0" algn="l">
               <a:buNone/>
             </a:pPr>
             <a:r>
@@ -9651,7 +9428,7 @@
             <a:endParaRPr lang="en-US" sz="720" dirty="0"/>
           </a:p>
           <a:p>
-            <a:pPr algn="l" indent="0" marL="0">
+            <a:pPr marL="0" indent="0" algn="l">
               <a:buNone/>
             </a:pPr>
             <a:r>
@@ -9695,7 +9472,7 @@
             <a:prstDash val="solid"/>
           </a:ln>
           <a:effectLst>
-            <a:outerShdw sx="100000" sy="100000" kx="0" ky="0" algn="bl" rotWithShape="0" blurRad="12700" dist="50800" dir="2700000">
+            <a:outerShdw blurRad="12700" dist="50800" dir="2700000" algn="bl" rotWithShape="0">
               <a:srgbClr val="000000">
                 <a:alpha val="12000"/>
               </a:srgbClr>
@@ -9726,7 +9503,7 @@
           </a:bodyPr>
           <a:lstStyle/>
           <a:p>
-            <a:pPr algn="l" indent="0" marL="0">
+            <a:pPr marL="0" indent="0" algn="l">
               <a:buNone/>
             </a:pPr>
             <a:r>
@@ -9767,7 +9544,7 @@
           </a:bodyPr>
           <a:lstStyle/>
           <a:p>
-            <a:pPr algn="l" indent="0" marL="0">
+            <a:pPr marL="0" indent="0" algn="l">
               <a:buNone/>
             </a:pPr>
             <a:r>
@@ -9808,7 +9585,7 @@
           </a:bodyPr>
           <a:lstStyle/>
           <a:p>
-            <a:pPr algn="l" indent="0" marL="0">
+            <a:pPr marL="0" indent="0" algn="l">
               <a:buNone/>
             </a:pPr>
             <a:r>
@@ -9825,7 +9602,7 @@
             <a:endParaRPr lang="en-US" sz="720" dirty="0"/>
           </a:p>
           <a:p>
-            <a:pPr algn="l" indent="0" marL="0">
+            <a:pPr marL="0" indent="0" algn="l">
               <a:buNone/>
             </a:pPr>
             <a:r>
@@ -9893,7 +9670,7 @@
           </a:bodyPr>
           <a:lstStyle/>
           <a:p>
-            <a:pPr algn="l" indent="0" marL="0">
+            <a:pPr marL="0" indent="0" algn="l">
               <a:buNone/>
             </a:pPr>
             <a:r>
@@ -9934,7 +9711,7 @@
           </a:bodyPr>
           <a:lstStyle/>
           <a:p>
-            <a:pPr algn="l" indent="0" marL="0">
+            <a:pPr marL="0" indent="0" algn="l">
               <a:buNone/>
             </a:pPr>
             <a:r>
@@ -9975,7 +9752,7 @@
           </a:bodyPr>
           <a:lstStyle/>
           <a:p>
-            <a:pPr algn="l" indent="0" marL="0">
+            <a:pPr marL="0" indent="0" algn="l">
               <a:buNone/>
             </a:pPr>
             <a:r>
@@ -10016,7 +9793,7 @@
           </a:bodyPr>
           <a:lstStyle/>
           <a:p>
-            <a:pPr algn="ctr" indent="0" marL="0">
+            <a:pPr marL="0" indent="0" algn="ctr">
               <a:buNone/>
             </a:pPr>
             <a:r>
@@ -10050,6 +9827,7 @@
         <a:solidFill>
           <a:srgbClr val="F7FAFC"/>
         </a:solidFill>
+        <a:effectLst/>
       </p:bgPr>
     </p:bg>
     <p:spTree>
@@ -10172,7 +9950,7 @@
           </a:bodyPr>
           <a:lstStyle/>
           <a:p>
-            <a:pPr algn="l" indent="0" marL="0">
+            <a:pPr marL="0" indent="0" algn="l">
               <a:buNone/>
             </a:pPr>
             <a:r>
@@ -10213,7 +9991,7 @@
           </a:bodyPr>
           <a:lstStyle/>
           <a:p>
-            <a:pPr algn="l" indent="0" marL="0">
+            <a:pPr marL="0" indent="0" algn="l">
               <a:buNone/>
             </a:pPr>
             <a:r>
@@ -10298,7 +10076,7 @@
           <a:bodyPr wrap="square" lIns="0" tIns="0" rIns="0" bIns="0" rtlCol="0" anchor="ctr"/>
           <a:lstStyle/>
           <a:p>
-            <a:pPr indent="0" marL="0">
+            <a:pPr marL="0" indent="0">
               <a:buNone/>
             </a:pPr>
             <a:r>
@@ -10337,7 +10115,7 @@
           <a:bodyPr wrap="square" lIns="0" tIns="0" rIns="0" bIns="0" rtlCol="0" anchor="ctr"/>
           <a:lstStyle/>
           <a:p>
-            <a:pPr algn="r" indent="0" marL="0">
+            <a:pPr marL="0" indent="0" algn="r">
               <a:buNone/>
             </a:pPr>
             <a:r>
@@ -10378,7 +10156,7 @@
           </a:bodyPr>
           <a:lstStyle/>
           <a:p>
-            <a:pPr algn="ctr" indent="0" marL="0">
+            <a:pPr marL="0" indent="0" algn="ctr">
               <a:buNone/>
             </a:pPr>
             <a:r>
@@ -10422,7 +10200,7 @@
             <a:prstDash val="solid"/>
           </a:ln>
           <a:effectLst>
-            <a:outerShdw sx="100000" sy="100000" kx="0" ky="0" algn="bl" rotWithShape="0" blurRad="12700" dist="50800" dir="2700000">
+            <a:outerShdw blurRad="12700" dist="50800" dir="2700000" algn="bl" rotWithShape="0">
               <a:srgbClr val="000000">
                 <a:alpha val="12000"/>
               </a:srgbClr>
@@ -10453,7 +10231,7 @@
           </a:bodyPr>
           <a:lstStyle/>
           <a:p>
-            <a:pPr algn="l" indent="0" marL="0">
+            <a:pPr marL="0" indent="0" algn="l">
               <a:buNone/>
             </a:pPr>
             <a:r>
@@ -10494,7 +10272,7 @@
           </a:bodyPr>
           <a:lstStyle/>
           <a:p>
-            <a:pPr algn="l" indent="0" marL="0">
+            <a:pPr marL="0" indent="0" algn="l">
               <a:buNone/>
             </a:pPr>
             <a:r>
@@ -10538,7 +10316,7 @@
             <a:prstDash val="solid"/>
           </a:ln>
           <a:effectLst>
-            <a:outerShdw sx="100000" sy="100000" kx="0" ky="0" algn="bl" rotWithShape="0" blurRad="12700" dist="50800" dir="2700000">
+            <a:outerShdw blurRad="12700" dist="50800" dir="2700000" algn="bl" rotWithShape="0">
               <a:srgbClr val="000000">
                 <a:alpha val="12000"/>
               </a:srgbClr>
@@ -10569,7 +10347,7 @@
           </a:bodyPr>
           <a:lstStyle/>
           <a:p>
-            <a:pPr algn="l" indent="0" marL="0">
+            <a:pPr marL="0" indent="0" algn="l">
               <a:buNone/>
             </a:pPr>
             <a:r>
@@ -10610,7 +10388,7 @@
           </a:bodyPr>
           <a:lstStyle/>
           <a:p>
-            <a:pPr algn="l" indent="0" marL="0">
+            <a:pPr marL="0" indent="0" algn="l">
               <a:buNone/>
             </a:pPr>
             <a:r>
@@ -10654,7 +10432,7 @@
             <a:prstDash val="solid"/>
           </a:ln>
           <a:effectLst>
-            <a:outerShdw sx="100000" sy="100000" kx="0" ky="0" algn="bl" rotWithShape="0" blurRad="12700" dist="50800" dir="2700000">
+            <a:outerShdw blurRad="12700" dist="50800" dir="2700000" algn="bl" rotWithShape="0">
               <a:srgbClr val="000000">
                 <a:alpha val="12000"/>
               </a:srgbClr>
@@ -10685,7 +10463,7 @@
           </a:bodyPr>
           <a:lstStyle/>
           <a:p>
-            <a:pPr algn="l" indent="0" marL="0">
+            <a:pPr marL="0" indent="0" algn="l">
               <a:buNone/>
             </a:pPr>
             <a:r>
@@ -10726,7 +10504,7 @@
           </a:bodyPr>
           <a:lstStyle/>
           <a:p>
-            <a:pPr algn="l" indent="0" marL="0">
+            <a:pPr marL="0" indent="0" algn="l">
               <a:buNone/>
             </a:pPr>
             <a:r>
@@ -10770,7 +10548,7 @@
             <a:prstDash val="solid"/>
           </a:ln>
           <a:effectLst>
-            <a:outerShdw sx="100000" sy="100000" kx="0" ky="0" algn="bl" rotWithShape="0" blurRad="12700" dist="50800" dir="2700000">
+            <a:outerShdw blurRad="12700" dist="50800" dir="2700000" algn="bl" rotWithShape="0">
               <a:srgbClr val="000000">
                 <a:alpha val="12000"/>
               </a:srgbClr>
@@ -10801,7 +10579,7 @@
           </a:bodyPr>
           <a:lstStyle/>
           <a:p>
-            <a:pPr algn="ctr" indent="0" marL="0">
+            <a:pPr marL="0" indent="0" algn="ctr">
               <a:buNone/>
             </a:pPr>
             <a:r>
@@ -10842,7 +10620,7 @@
           </a:bodyPr>
           <a:lstStyle/>
           <a:p>
-            <a:pPr algn="ctr" indent="0" marL="0">
+            <a:pPr marL="0" indent="0" algn="ctr">
               <a:buNone/>
             </a:pPr>
             <a:r>
@@ -10876,6 +10654,7 @@
         <a:solidFill>
           <a:srgbClr val="F7FAFC"/>
         </a:solidFill>
+        <a:effectLst/>
       </p:bgPr>
     </p:bg>
     <p:spTree>
@@ -10998,7 +10777,7 @@
           </a:bodyPr>
           <a:lstStyle/>
           <a:p>
-            <a:pPr algn="l" indent="0" marL="0">
+            <a:pPr marL="0" indent="0" algn="l">
               <a:buNone/>
             </a:pPr>
             <a:r>
@@ -11039,7 +10818,7 @@
           </a:bodyPr>
           <a:lstStyle/>
           <a:p>
-            <a:pPr algn="l" indent="0" marL="0">
+            <a:pPr marL="0" indent="0" algn="l">
               <a:buNone/>
             </a:pPr>
             <a:r>
@@ -11124,7 +10903,7 @@
           <a:bodyPr wrap="square" lIns="0" tIns="0" rIns="0" bIns="0" rtlCol="0" anchor="ctr"/>
           <a:lstStyle/>
           <a:p>
-            <a:pPr indent="0" marL="0">
+            <a:pPr marL="0" indent="0">
               <a:buNone/>
             </a:pPr>
             <a:r>
@@ -11163,7 +10942,7 @@
           <a:bodyPr wrap="square" lIns="0" tIns="0" rIns="0" bIns="0" rtlCol="0" anchor="ctr"/>
           <a:lstStyle/>
           <a:p>
-            <a:pPr algn="r" indent="0" marL="0">
+            <a:pPr marL="0" indent="0" algn="r">
               <a:buNone/>
             </a:pPr>
             <a:r>
@@ -11204,7 +10983,7 @@
           </a:bodyPr>
           <a:lstStyle/>
           <a:p>
-            <a:pPr algn="l" indent="0" marL="0">
+            <a:pPr marL="0" indent="0" algn="l">
               <a:buNone/>
             </a:pPr>
             <a:r>
@@ -11270,7 +11049,7 @@
           <a:bodyPr wrap="square" lIns="0" tIns="0" rIns="0" bIns="0" rtlCol="0" anchor="ctr"/>
           <a:lstStyle/>
           <a:p>
-            <a:pPr algn="ctr" indent="0" marL="0">
+            <a:pPr marL="0" indent="0" algn="ctr">
               <a:buNone/>
             </a:pPr>
             <a:r>
@@ -11311,7 +11090,7 @@
           </a:bodyPr>
           <a:lstStyle/>
           <a:p>
-            <a:pPr algn="ctr" indent="0" marL="0">
+            <a:pPr marL="0" indent="0" algn="ctr">
               <a:buNone/>
             </a:pPr>
             <a:r>
@@ -11352,7 +11131,7 @@
           </a:bodyPr>
           <a:lstStyle/>
           <a:p>
-            <a:pPr algn="ctr" indent="0" marL="0">
+            <a:pPr marL="0" indent="0" algn="ctr">
               <a:buNone/>
             </a:pPr>
             <a:r>
@@ -11447,7 +11226,7 @@
           <a:bodyPr wrap="square" lIns="0" tIns="0" rIns="0" bIns="0" rtlCol="0" anchor="ctr"/>
           <a:lstStyle/>
           <a:p>
-            <a:pPr algn="ctr" indent="0" marL="0">
+            <a:pPr marL="0" indent="0" algn="ctr">
               <a:buNone/>
             </a:pPr>
             <a:r>
@@ -11488,7 +11267,7 @@
           </a:bodyPr>
           <a:lstStyle/>
           <a:p>
-            <a:pPr algn="ctr" indent="0" marL="0">
+            <a:pPr marL="0" indent="0" algn="ctr">
               <a:buNone/>
             </a:pPr>
             <a:r>
@@ -11529,7 +11308,7 @@
           </a:bodyPr>
           <a:lstStyle/>
           <a:p>
-            <a:pPr algn="ctr" indent="0" marL="0">
+            <a:pPr marL="0" indent="0" algn="ctr">
               <a:buNone/>
             </a:pPr>
             <a:r>
@@ -11624,7 +11403,7 @@
           <a:bodyPr wrap="square" lIns="0" tIns="0" rIns="0" bIns="0" rtlCol="0" anchor="ctr"/>
           <a:lstStyle/>
           <a:p>
-            <a:pPr algn="ctr" indent="0" marL="0">
+            <a:pPr marL="0" indent="0" algn="ctr">
               <a:buNone/>
             </a:pPr>
             <a:r>
@@ -11665,7 +11444,7 @@
           </a:bodyPr>
           <a:lstStyle/>
           <a:p>
-            <a:pPr algn="ctr" indent="0" marL="0">
+            <a:pPr marL="0" indent="0" algn="ctr">
               <a:buNone/>
             </a:pPr>
             <a:r>
@@ -11706,7 +11485,7 @@
           </a:bodyPr>
           <a:lstStyle/>
           <a:p>
-            <a:pPr algn="ctr" indent="0" marL="0">
+            <a:pPr marL="0" indent="0" algn="ctr">
               <a:buNone/>
             </a:pPr>
             <a:r>
@@ -11801,7 +11580,7 @@
           <a:bodyPr wrap="square" lIns="0" tIns="0" rIns="0" bIns="0" rtlCol="0" anchor="ctr"/>
           <a:lstStyle/>
           <a:p>
-            <a:pPr algn="ctr" indent="0" marL="0">
+            <a:pPr marL="0" indent="0" algn="ctr">
               <a:buNone/>
             </a:pPr>
             <a:r>
@@ -11842,7 +11621,7 @@
           </a:bodyPr>
           <a:lstStyle/>
           <a:p>
-            <a:pPr algn="ctr" indent="0" marL="0">
+            <a:pPr marL="0" indent="0" algn="ctr">
               <a:buNone/>
             </a:pPr>
             <a:r>
@@ -11883,7 +11662,7 @@
           </a:bodyPr>
           <a:lstStyle/>
           <a:p>
-            <a:pPr algn="ctr" indent="0" marL="0">
+            <a:pPr marL="0" indent="0" algn="ctr">
               <a:buNone/>
             </a:pPr>
             <a:r>
@@ -11978,7 +11757,7 @@
           <a:bodyPr wrap="square" lIns="0" tIns="0" rIns="0" bIns="0" rtlCol="0" anchor="ctr"/>
           <a:lstStyle/>
           <a:p>
-            <a:pPr algn="ctr" indent="0" marL="0">
+            <a:pPr marL="0" indent="0" algn="ctr">
               <a:buNone/>
             </a:pPr>
             <a:r>
@@ -12019,7 +11798,7 @@
           </a:bodyPr>
           <a:lstStyle/>
           <a:p>
-            <a:pPr algn="ctr" indent="0" marL="0">
+            <a:pPr marL="0" indent="0" algn="ctr">
               <a:buNone/>
             </a:pPr>
             <a:r>
@@ -12060,7 +11839,7 @@
           </a:bodyPr>
           <a:lstStyle/>
           <a:p>
-            <a:pPr algn="ctr" indent="0" marL="0">
+            <a:pPr marL="0" indent="0" algn="ctr">
               <a:buNone/>
             </a:pPr>
             <a:r>
@@ -12104,7 +11883,7 @@
             <a:prstDash val="solid"/>
           </a:ln>
           <a:effectLst>
-            <a:outerShdw sx="100000" sy="100000" kx="0" ky="0" algn="bl" rotWithShape="0" blurRad="12700" dist="50800" dir="2700000">
+            <a:outerShdw blurRad="12700" dist="50800" dir="2700000" algn="bl" rotWithShape="0">
               <a:srgbClr val="000000">
                 <a:alpha val="12000"/>
               </a:srgbClr>
@@ -12135,7 +11914,7 @@
           </a:bodyPr>
           <a:lstStyle/>
           <a:p>
-            <a:pPr algn="l" indent="0" marL="0">
+            <a:pPr marL="0" indent="0" algn="l">
               <a:buNone/>
             </a:pPr>
             <a:r>
@@ -12176,7 +11955,7 @@
           </a:bodyPr>
           <a:lstStyle/>
           <a:p>
-            <a:pPr algn="l" indent="0" marL="0">
+            <a:pPr marL="0" indent="0" algn="l">
               <a:buNone/>
             </a:pPr>
             <a:r>
@@ -12210,6 +11989,7 @@
         <a:solidFill>
           <a:srgbClr val="F7FAFC"/>
         </a:solidFill>
+        <a:effectLst/>
       </p:bgPr>
     </p:bg>
     <p:spTree>
@@ -12332,7 +12112,7 @@
           </a:bodyPr>
           <a:lstStyle/>
           <a:p>
-            <a:pPr algn="l" indent="0" marL="0">
+            <a:pPr marL="0" indent="0" algn="l">
               <a:buNone/>
             </a:pPr>
             <a:r>
@@ -12373,7 +12153,7 @@
           </a:bodyPr>
           <a:lstStyle/>
           <a:p>
-            <a:pPr algn="l" indent="0" marL="0">
+            <a:pPr marL="0" indent="0" algn="l">
               <a:buNone/>
             </a:pPr>
             <a:r>
@@ -12458,7 +12238,7 @@
           <a:bodyPr wrap="square" lIns="0" tIns="0" rIns="0" bIns="0" rtlCol="0" anchor="ctr"/>
           <a:lstStyle/>
           <a:p>
-            <a:pPr indent="0" marL="0">
+            <a:pPr marL="0" indent="0">
               <a:buNone/>
             </a:pPr>
             <a:r>
@@ -12497,7 +12277,7 @@
           <a:bodyPr wrap="square" lIns="0" tIns="0" rIns="0" bIns="0" rtlCol="0" anchor="ctr"/>
           <a:lstStyle/>
           <a:p>
-            <a:pPr algn="r" indent="0" marL="0">
+            <a:pPr marL="0" indent="0" algn="r">
               <a:buNone/>
             </a:pPr>
             <a:r>
@@ -12538,7 +12318,7 @@
           </a:bodyPr>
           <a:lstStyle/>
           <a:p>
-            <a:pPr algn="l" indent="0" marL="0">
+            <a:pPr marL="0" indent="0" algn="l">
               <a:buNone/>
             </a:pPr>
             <a:r>
@@ -12582,7 +12362,7 @@
             <a:prstDash val="solid"/>
           </a:ln>
           <a:effectLst>
-            <a:outerShdw sx="100000" sy="100000" kx="0" ky="0" algn="bl" rotWithShape="0" blurRad="12700" dist="50800" dir="2700000">
+            <a:outerShdw blurRad="12700" dist="50800" dir="2700000" algn="bl" rotWithShape="0">
               <a:srgbClr val="000000">
                 <a:alpha val="12000"/>
               </a:srgbClr>
@@ -12592,14 +12372,14 @@
       </p:sp>
       <p:pic>
         <p:nvPicPr>
-          <p:cNvPr id="13" name="Image 0" descr="/mnt/data/material_ui_flow.jpg">    </p:cNvPr>
+          <p:cNvPr id="13" name="Image 0" descr="/mnt/data/material_ui_flow.jpg"/>
           <p:cNvPicPr>
             <a:picLocks noChangeAspect="1"/>
           </p:cNvPicPr>
           <p:nvPr/>
         </p:nvPicPr>
         <p:blipFill>
-          <a:blip r:embed="rId1"/>
+          <a:blip r:embed="rId3"/>
           <a:stretch>
             <a:fillRect/>
           </a:stretch>
@@ -12664,7 +12444,7 @@
           <a:bodyPr wrap="square" lIns="0" tIns="0" rIns="0" bIns="0" rtlCol="0" anchor="ctr"/>
           <a:lstStyle/>
           <a:p>
-            <a:pPr algn="ctr" indent="0" marL="0">
+            <a:pPr marL="0" indent="0" algn="ctr">
               <a:buNone/>
             </a:pPr>
             <a:r>
@@ -12705,7 +12485,7 @@
           </a:bodyPr>
           <a:lstStyle/>
           <a:p>
-            <a:pPr algn="l" indent="0" marL="0">
+            <a:pPr marL="0" indent="0" algn="l">
               <a:buNone/>
             </a:pPr>
             <a:r>
@@ -12773,7 +12553,7 @@
           <a:bodyPr wrap="square" lIns="0" tIns="0" rIns="0" bIns="0" rtlCol="0" anchor="ctr"/>
           <a:lstStyle/>
           <a:p>
-            <a:pPr algn="ctr" indent="0" marL="0">
+            <a:pPr marL="0" indent="0" algn="ctr">
               <a:buNone/>
             </a:pPr>
             <a:r>
@@ -12814,7 +12594,7 @@
           </a:bodyPr>
           <a:lstStyle/>
           <a:p>
-            <a:pPr algn="l" indent="0" marL="0">
+            <a:pPr marL="0" indent="0" algn="l">
               <a:buNone/>
             </a:pPr>
             <a:r>
@@ -12848,6 +12628,7 @@
         <a:solidFill>
           <a:srgbClr val="F7FAFC"/>
         </a:solidFill>
+        <a:effectLst/>
       </p:bgPr>
     </p:bg>
     <p:spTree>
@@ -12970,7 +12751,7 @@
           </a:bodyPr>
           <a:lstStyle/>
           <a:p>
-            <a:pPr algn="l" indent="0" marL="0">
+            <a:pPr marL="0" indent="0" algn="l">
               <a:buNone/>
             </a:pPr>
             <a:r>
@@ -13011,7 +12792,7 @@
           </a:bodyPr>
           <a:lstStyle/>
           <a:p>
-            <a:pPr algn="l" indent="0" marL="0">
+            <a:pPr marL="0" indent="0" algn="l">
               <a:buNone/>
             </a:pPr>
             <a:r>
@@ -13096,7 +12877,7 @@
           <a:bodyPr wrap="square" lIns="0" tIns="0" rIns="0" bIns="0" rtlCol="0" anchor="ctr"/>
           <a:lstStyle/>
           <a:p>
-            <a:pPr indent="0" marL="0">
+            <a:pPr marL="0" indent="0">
               <a:buNone/>
             </a:pPr>
             <a:r>
@@ -13135,7 +12916,7 @@
           <a:bodyPr wrap="square" lIns="0" tIns="0" rIns="0" bIns="0" rtlCol="0" anchor="ctr"/>
           <a:lstStyle/>
           <a:p>
-            <a:pPr algn="r" indent="0" marL="0">
+            <a:pPr marL="0" indent="0" algn="r">
               <a:buNone/>
             </a:pPr>
             <a:r>
@@ -13176,7 +12957,7 @@
           </a:bodyPr>
           <a:lstStyle/>
           <a:p>
-            <a:pPr algn="l" indent="0" marL="0">
+            <a:pPr marL="0" indent="0" algn="l">
               <a:buNone/>
             </a:pPr>
             <a:r>
@@ -13217,7 +12998,7 @@
           </a:bodyPr>
           <a:lstStyle/>
           <a:p>
-            <a:pPr algn="l" indent="0" marL="0">
+            <a:pPr marL="0" indent="0" algn="l">
               <a:buNone/>
             </a:pPr>
             <a:r>
@@ -13261,7 +13042,7 @@
             <a:prstDash val="solid"/>
           </a:ln>
           <a:effectLst>
-            <a:outerShdw sx="100000" sy="100000" kx="0" ky="0" algn="bl" rotWithShape="0" blurRad="12700" dist="50800" dir="2700000">
+            <a:outerShdw blurRad="12700" dist="50800" dir="2700000" algn="bl" rotWithShape="0">
               <a:srgbClr val="000000">
                 <a:alpha val="12000"/>
               </a:srgbClr>
@@ -13292,7 +13073,7 @@
           </a:bodyPr>
           <a:lstStyle/>
           <a:p>
-            <a:pPr algn="l" indent="0" marL="0">
+            <a:pPr marL="0" indent="0" algn="l">
               <a:buNone/>
             </a:pPr>
             <a:r>
@@ -13333,7 +13114,7 @@
           </a:bodyPr>
           <a:lstStyle/>
           <a:p>
-            <a:pPr algn="l" indent="0" marL="0">
+            <a:pPr marL="0" indent="0" algn="l">
               <a:buNone/>
             </a:pPr>
             <a:r>
@@ -13402,7 +13183,7 @@
             <a:prstDash val="solid"/>
           </a:ln>
           <a:effectLst>
-            <a:outerShdw sx="100000" sy="100000" kx="0" ky="0" algn="bl" rotWithShape="0" blurRad="12700" dist="50800" dir="2700000">
+            <a:outerShdw blurRad="12700" dist="50800" dir="2700000" algn="bl" rotWithShape="0">
               <a:srgbClr val="000000">
                 <a:alpha val="12000"/>
               </a:srgbClr>
@@ -13433,7 +13214,7 @@
           </a:bodyPr>
           <a:lstStyle/>
           <a:p>
-            <a:pPr algn="l" indent="0" marL="0">
+            <a:pPr marL="0" indent="0" algn="l">
               <a:buNone/>
             </a:pPr>
             <a:r>
@@ -13474,7 +13255,7 @@
           </a:bodyPr>
           <a:lstStyle/>
           <a:p>
-            <a:pPr algn="l" indent="0" marL="0">
+            <a:pPr marL="0" indent="0" algn="l">
               <a:buNone/>
             </a:pPr>
             <a:r>
@@ -13543,7 +13324,7 @@
             <a:prstDash val="solid"/>
           </a:ln>
           <a:effectLst>
-            <a:outerShdw sx="100000" sy="100000" kx="0" ky="0" algn="bl" rotWithShape="0" blurRad="12700" dist="50800" dir="2700000">
+            <a:outerShdw blurRad="12700" dist="50800" dir="2700000" algn="bl" rotWithShape="0">
               <a:srgbClr val="000000">
                 <a:alpha val="12000"/>
               </a:srgbClr>
@@ -13574,7 +13355,7 @@
           </a:bodyPr>
           <a:lstStyle/>
           <a:p>
-            <a:pPr algn="l" indent="0" marL="0">
+            <a:pPr marL="0" indent="0" algn="l">
               <a:buNone/>
             </a:pPr>
             <a:r>
@@ -13615,7 +13396,7 @@
           </a:bodyPr>
           <a:lstStyle/>
           <a:p>
-            <a:pPr algn="l" indent="0" marL="0">
+            <a:pPr marL="0" indent="0" algn="l">
               <a:buNone/>
             </a:pPr>
             <a:r>
@@ -13684,7 +13465,7 @@
             <a:prstDash val="solid"/>
           </a:ln>
           <a:effectLst>
-            <a:outerShdw sx="100000" sy="100000" kx="0" ky="0" algn="bl" rotWithShape="0" blurRad="12700" dist="50800" dir="2700000">
+            <a:outerShdw blurRad="12700" dist="50800" dir="2700000" algn="bl" rotWithShape="0">
               <a:srgbClr val="000000">
                 <a:alpha val="12000"/>
               </a:srgbClr>
@@ -13715,7 +13496,7 @@
           </a:bodyPr>
           <a:lstStyle/>
           <a:p>
-            <a:pPr algn="l" indent="0" marL="0">
+            <a:pPr marL="0" indent="0" algn="l">
               <a:buNone/>
             </a:pPr>
             <a:r>
@@ -13756,7 +13537,7 @@
           </a:bodyPr>
           <a:lstStyle/>
           <a:p>
-            <a:pPr algn="l" indent="0" marL="0">
+            <a:pPr marL="0" indent="0" algn="l">
               <a:buNone/>
             </a:pPr>
             <a:r>
@@ -13825,7 +13606,7 @@
             <a:prstDash val="solid"/>
           </a:ln>
           <a:effectLst>
-            <a:outerShdw sx="100000" sy="100000" kx="0" ky="0" algn="bl" rotWithShape="0" blurRad="12700" dist="50800" dir="2700000">
+            <a:outerShdw blurRad="12700" dist="50800" dir="2700000" algn="bl" rotWithShape="0">
               <a:srgbClr val="000000">
                 <a:alpha val="12000"/>
               </a:srgbClr>
@@ -13856,7 +13637,7 @@
           </a:bodyPr>
           <a:lstStyle/>
           <a:p>
-            <a:pPr algn="l" indent="0" marL="0">
+            <a:pPr marL="0" indent="0" algn="l">
               <a:buNone/>
             </a:pPr>
             <a:r>
@@ -13897,7 +13678,7 @@
           </a:bodyPr>
           <a:lstStyle/>
           <a:p>
-            <a:pPr algn="l" indent="0" marL="0">
+            <a:pPr marL="0" indent="0" algn="l">
               <a:buNone/>
             </a:pPr>
             <a:r>
@@ -13938,7 +13719,7 @@
           </a:bodyPr>
           <a:lstStyle/>
           <a:p>
-            <a:pPr algn="l" indent="0" marL="0">
+            <a:pPr marL="0" indent="0" algn="l">
               <a:buNone/>
             </a:pPr>
             <a:r>
@@ -14006,7 +13787,7 @@
           </a:bodyPr>
           <a:lstStyle/>
           <a:p>
-            <a:pPr algn="l" indent="0" marL="0">
+            <a:pPr marL="0" indent="0" algn="l">
               <a:buNone/>
             </a:pPr>
             <a:r>
@@ -14047,7 +13828,7 @@
           </a:bodyPr>
           <a:lstStyle/>
           <a:p>
-            <a:pPr algn="l" indent="0" marL="0">
+            <a:pPr marL="0" indent="0" algn="l">
               <a:buNone/>
             </a:pPr>
             <a:r>
@@ -14140,7 +13921,7 @@
           </a:bodyPr>
           <a:lstStyle/>
           <a:p>
-            <a:pPr algn="l" indent="0" marL="0">
+            <a:pPr marL="0" indent="0" algn="l">
               <a:buNone/>
             </a:pPr>
             <a:r>
@@ -14181,7 +13962,7 @@
           </a:bodyPr>
           <a:lstStyle/>
           <a:p>
-            <a:pPr algn="l" indent="0" marL="0">
+            <a:pPr marL="0" indent="0" algn="l">
               <a:buNone/>
             </a:pPr>
             <a:r>
@@ -14274,7 +14055,7 @@
           </a:bodyPr>
           <a:lstStyle/>
           <a:p>
-            <a:pPr algn="l" indent="0" marL="0">
+            <a:pPr marL="0" indent="0" algn="l">
               <a:buNone/>
             </a:pPr>
             <a:r>
@@ -14315,7 +14096,7 @@
           </a:bodyPr>
           <a:lstStyle/>
           <a:p>
-            <a:pPr algn="l" indent="0" marL="0">
+            <a:pPr marL="0" indent="0" algn="l">
               <a:buNone/>
             </a:pPr>
             <a:r>
@@ -14408,7 +14189,7 @@
           </a:bodyPr>
           <a:lstStyle/>
           <a:p>
-            <a:pPr algn="l" indent="0" marL="0">
+            <a:pPr marL="0" indent="0" algn="l">
               <a:buNone/>
             </a:pPr>
             <a:r>
@@ -14449,7 +14230,7 @@
           </a:bodyPr>
           <a:lstStyle/>
           <a:p>
-            <a:pPr algn="l" indent="0" marL="0">
+            <a:pPr marL="0" indent="0" algn="l">
               <a:buNone/>
             </a:pPr>
             <a:r>
@@ -14542,7 +14323,7 @@
           </a:bodyPr>
           <a:lstStyle/>
           <a:p>
-            <a:pPr algn="l" indent="0" marL="0">
+            <a:pPr marL="0" indent="0" algn="l">
               <a:buNone/>
             </a:pPr>
             <a:r>
@@ -14583,7 +14364,7 @@
           </a:bodyPr>
           <a:lstStyle/>
           <a:p>
-            <a:pPr algn="l" indent="0" marL="0">
+            <a:pPr marL="0" indent="0" algn="l">
               <a:buNone/>
             </a:pPr>
             <a:r>
@@ -14676,7 +14457,7 @@
           </a:bodyPr>
           <a:lstStyle/>
           <a:p>
-            <a:pPr algn="l" indent="0" marL="0">
+            <a:pPr marL="0" indent="0" algn="l">
               <a:buNone/>
             </a:pPr>
             <a:r>
@@ -14717,7 +14498,7 @@
           </a:bodyPr>
           <a:lstStyle/>
           <a:p>
-            <a:pPr algn="l" indent="0" marL="0">
+            <a:pPr marL="0" indent="0" algn="l">
               <a:buNone/>
             </a:pPr>
             <a:r>
@@ -14744,7 +14525,7 @@
         <p:spPr>
           <a:xfrm>
             <a:off x="8586216" y="4654296"/>
-            <a:ext cx="109728" cy="-1746504"/>
+            <a:ext cx="109728" cy="0"/>
           </a:xfrm>
           <a:prstGeom prst="line">
             <a:avLst/>
@@ -14808,7 +14589,7 @@
           </a:bodyPr>
           <a:lstStyle/>
           <a:p>
-            <a:pPr algn="l" indent="0" marL="0">
+            <a:pPr marL="0" indent="0" algn="l">
               <a:buNone/>
             </a:pPr>
             <a:r>
@@ -14842,6 +14623,7 @@
         <a:solidFill>
           <a:srgbClr val="F7FAFC"/>
         </a:solidFill>
+        <a:effectLst/>
       </p:bgPr>
     </p:bg>
     <p:spTree>
@@ -14964,7 +14746,7 @@
           </a:bodyPr>
           <a:lstStyle/>
           <a:p>
-            <a:pPr algn="l" indent="0" marL="0">
+            <a:pPr marL="0" indent="0" algn="l">
               <a:buNone/>
             </a:pPr>
             <a:r>
@@ -15005,7 +14787,7 @@
           </a:bodyPr>
           <a:lstStyle/>
           <a:p>
-            <a:pPr algn="l" indent="0" marL="0">
+            <a:pPr marL="0" indent="0" algn="l">
               <a:buNone/>
             </a:pPr>
             <a:r>
@@ -15090,7 +14872,7 @@
           <a:bodyPr wrap="square" lIns="0" tIns="0" rIns="0" bIns="0" rtlCol="0" anchor="ctr"/>
           <a:lstStyle/>
           <a:p>
-            <a:pPr indent="0" marL="0">
+            <a:pPr marL="0" indent="0">
               <a:buNone/>
             </a:pPr>
             <a:r>
@@ -15129,7 +14911,7 @@
           <a:bodyPr wrap="square" lIns="0" tIns="0" rIns="0" bIns="0" rtlCol="0" anchor="ctr"/>
           <a:lstStyle/>
           <a:p>
-            <a:pPr algn="r" indent="0" marL="0">
+            <a:pPr marL="0" indent="0" algn="r">
               <a:buNone/>
             </a:pPr>
             <a:r>
@@ -15170,7 +14952,7 @@
           </a:bodyPr>
           <a:lstStyle/>
           <a:p>
-            <a:pPr algn="l" indent="0" marL="0">
+            <a:pPr marL="0" indent="0" algn="l">
               <a:buNone/>
             </a:pPr>
             <a:r>
@@ -15214,7 +14996,7 @@
             <a:prstDash val="solid"/>
           </a:ln>
           <a:effectLst>
-            <a:outerShdw sx="100000" sy="100000" kx="0" ky="0" algn="bl" rotWithShape="0" blurRad="12700" dist="50800" dir="2700000">
+            <a:outerShdw blurRad="12700" dist="50800" dir="2700000" algn="bl" rotWithShape="0">
               <a:srgbClr val="000000">
                 <a:alpha val="12000"/>
               </a:srgbClr>
@@ -15245,7 +15027,7 @@
           </a:bodyPr>
           <a:lstStyle/>
           <a:p>
-            <a:pPr algn="l" indent="0" marL="0">
+            <a:pPr marL="0" indent="0" algn="l">
               <a:buNone/>
             </a:pPr>
             <a:r>
@@ -15286,7 +15068,7 @@
           </a:bodyPr>
           <a:lstStyle/>
           <a:p>
-            <a:pPr algn="l" indent="0" marL="0">
+            <a:pPr marL="0" indent="0" algn="l">
               <a:buNone/>
             </a:pPr>
             <a:r>
@@ -15303,7 +15085,7 @@
             <a:endParaRPr lang="en-US" sz="770" dirty="0"/>
           </a:p>
           <a:p>
-            <a:pPr algn="l" indent="0" marL="0">
+            <a:pPr marL="0" indent="0" algn="l">
               <a:buNone/>
             </a:pPr>
             <a:r>
@@ -15372,7 +15154,7 @@
             <a:prstDash val="solid"/>
           </a:ln>
           <a:effectLst>
-            <a:outerShdw sx="100000" sy="100000" kx="0" ky="0" algn="bl" rotWithShape="0" blurRad="12700" dist="50800" dir="2700000">
+            <a:outerShdw blurRad="12700" dist="50800" dir="2700000" algn="bl" rotWithShape="0">
               <a:srgbClr val="000000">
                 <a:alpha val="12000"/>
               </a:srgbClr>
@@ -15403,7 +15185,7 @@
           </a:bodyPr>
           <a:lstStyle/>
           <a:p>
-            <a:pPr algn="l" indent="0" marL="0">
+            <a:pPr marL="0" indent="0" algn="l">
               <a:buNone/>
             </a:pPr>
             <a:r>
@@ -15444,7 +15226,7 @@
           </a:bodyPr>
           <a:lstStyle/>
           <a:p>
-            <a:pPr algn="l" indent="0" marL="0">
+            <a:pPr marL="0" indent="0" algn="l">
               <a:buNone/>
             </a:pPr>
             <a:r>
@@ -15461,7 +15243,7 @@
             <a:endParaRPr lang="en-US" sz="1040" dirty="0"/>
           </a:p>
           <a:p>
-            <a:pPr algn="l" indent="0" marL="0">
+            <a:pPr marL="0" indent="0" algn="l">
               <a:buNone/>
             </a:pPr>
             <a:r>
@@ -15478,7 +15260,7 @@
             <a:endParaRPr lang="en-US" sz="1040" dirty="0"/>
           </a:p>
           <a:p>
-            <a:pPr algn="l" indent="0" marL="0">
+            <a:pPr marL="0" indent="0" algn="l">
               <a:buNone/>
             </a:pPr>
             <a:r>
@@ -15546,7 +15328,7 @@
           <a:bodyPr wrap="square" lIns="0" tIns="0" rIns="0" bIns="0" rtlCol="0" anchor="ctr"/>
           <a:lstStyle/>
           <a:p>
-            <a:pPr algn="ctr" indent="0" marL="0">
+            <a:pPr marL="0" indent="0" algn="ctr">
               <a:buNone/>
             </a:pPr>
             <a:r>
@@ -15587,7 +15369,7 @@
           </a:bodyPr>
           <a:lstStyle/>
           <a:p>
-            <a:pPr algn="l" indent="0" marL="0">
+            <a:pPr marL="0" indent="0" algn="l">
               <a:buNone/>
             </a:pPr>
             <a:r>
@@ -15656,7 +15438,7 @@
             <a:prstDash val="solid"/>
           </a:ln>
           <a:effectLst>
-            <a:outerShdw sx="100000" sy="100000" kx="0" ky="0" algn="bl" rotWithShape="0" blurRad="12700" dist="50800" dir="2700000">
+            <a:outerShdw blurRad="12700" dist="50800" dir="2700000" algn="bl" rotWithShape="0">
               <a:srgbClr val="000000">
                 <a:alpha val="12000"/>
               </a:srgbClr>
@@ -15687,7 +15469,7 @@
           </a:bodyPr>
           <a:lstStyle/>
           <a:p>
-            <a:pPr algn="l" indent="0" marL="0">
+            <a:pPr marL="0" indent="0" algn="l">
               <a:buNone/>
             </a:pPr>
             <a:r>
@@ -15728,7 +15510,7 @@
           </a:bodyPr>
           <a:lstStyle/>
           <a:p>
-            <a:pPr algn="l" indent="0" marL="0">
+            <a:pPr marL="0" indent="0" algn="l">
               <a:buNone/>
             </a:pPr>
             <a:r>
@@ -15745,7 +15527,7 @@
             <a:endParaRPr lang="en-US" sz="770" dirty="0"/>
           </a:p>
           <a:p>
-            <a:pPr algn="l" indent="0" marL="0">
+            <a:pPr marL="0" indent="0" algn="l">
               <a:buNone/>
             </a:pPr>
             <a:r>
@@ -15789,7 +15571,7 @@
             <a:prstDash val="solid"/>
           </a:ln>
           <a:effectLst>
-            <a:outerShdw sx="100000" sy="100000" kx="0" ky="0" algn="bl" rotWithShape="0" blurRad="12700" dist="50800" dir="2700000">
+            <a:outerShdw blurRad="12700" dist="50800" dir="2700000" algn="bl" rotWithShape="0">
               <a:srgbClr val="000000">
                 <a:alpha val="12000"/>
               </a:srgbClr>
@@ -15820,7 +15602,7 @@
           </a:bodyPr>
           <a:lstStyle/>
           <a:p>
-            <a:pPr algn="l" indent="0" marL="0">
+            <a:pPr marL="0" indent="0" algn="l">
               <a:buNone/>
             </a:pPr>
             <a:r>
@@ -15861,7 +15643,7 @@
           </a:bodyPr>
           <a:lstStyle/>
           <a:p>
-            <a:pPr algn="l" indent="0" marL="0">
+            <a:pPr marL="0" indent="0" algn="l">
               <a:buNone/>
             </a:pPr>
             <a:r>
@@ -15902,7 +15684,7 @@
           </a:bodyPr>
           <a:lstStyle/>
           <a:p>
-            <a:pPr algn="l" indent="0" marL="0">
+            <a:pPr marL="0" indent="0" algn="l">
               <a:buNone/>
             </a:pPr>
             <a:r>
@@ -15936,6 +15718,7 @@
         <a:solidFill>
           <a:srgbClr val="F7FAFC"/>
         </a:solidFill>
+        <a:effectLst/>
       </p:bgPr>
     </p:bg>
     <p:spTree>
@@ -16058,7 +15841,7 @@
           </a:bodyPr>
           <a:lstStyle/>
           <a:p>
-            <a:pPr algn="l" indent="0" marL="0">
+            <a:pPr marL="0" indent="0" algn="l">
               <a:buNone/>
             </a:pPr>
             <a:r>
@@ -16099,7 +15882,7 @@
           </a:bodyPr>
           <a:lstStyle/>
           <a:p>
-            <a:pPr algn="l" indent="0" marL="0">
+            <a:pPr marL="0" indent="0" algn="l">
               <a:buNone/>
             </a:pPr>
             <a:r>
@@ -16184,7 +15967,7 @@
           <a:bodyPr wrap="square" lIns="0" tIns="0" rIns="0" bIns="0" rtlCol="0" anchor="ctr"/>
           <a:lstStyle/>
           <a:p>
-            <a:pPr indent="0" marL="0">
+            <a:pPr marL="0" indent="0">
               <a:buNone/>
             </a:pPr>
             <a:r>
@@ -16223,7 +16006,7 @@
           <a:bodyPr wrap="square" lIns="0" tIns="0" rIns="0" bIns="0" rtlCol="0" anchor="ctr"/>
           <a:lstStyle/>
           <a:p>
-            <a:pPr algn="r" indent="0" marL="0">
+            <a:pPr marL="0" indent="0" algn="r">
               <a:buNone/>
             </a:pPr>
             <a:r>
@@ -16264,7 +16047,7 @@
           </a:bodyPr>
           <a:lstStyle/>
           <a:p>
-            <a:pPr algn="l" indent="0" marL="0">
+            <a:pPr marL="0" indent="0" algn="l">
               <a:buNone/>
             </a:pPr>
             <a:r>
@@ -16308,7 +16091,7 @@
             <a:prstDash val="solid"/>
           </a:ln>
           <a:effectLst>
-            <a:outerShdw sx="100000" sy="100000" kx="0" ky="0" algn="bl" rotWithShape="0" blurRad="12700" dist="50800" dir="2700000">
+            <a:outerShdw blurRad="12700" dist="50800" dir="2700000" algn="bl" rotWithShape="0">
               <a:srgbClr val="000000">
                 <a:alpha val="12000"/>
               </a:srgbClr>
@@ -16339,7 +16122,7 @@
           </a:bodyPr>
           <a:lstStyle/>
           <a:p>
-            <a:pPr algn="ctr" indent="0" marL="0">
+            <a:pPr marL="0" indent="0" algn="ctr">
               <a:buNone/>
             </a:pPr>
             <a:r>
@@ -16380,7 +16163,7 @@
           </a:bodyPr>
           <a:lstStyle/>
           <a:p>
-            <a:pPr algn="ctr" indent="0" marL="0">
+            <a:pPr marL="0" indent="0" algn="ctr">
               <a:buNone/>
             </a:pPr>
             <a:r>
@@ -16424,7 +16207,7 @@
             <a:prstDash val="solid"/>
           </a:ln>
           <a:effectLst>
-            <a:outerShdw sx="100000" sy="100000" kx="0" ky="0" algn="bl" rotWithShape="0" blurRad="12700" dist="50800" dir="2700000">
+            <a:outerShdw blurRad="12700" dist="50800" dir="2700000" algn="bl" rotWithShape="0">
               <a:srgbClr val="000000">
                 <a:alpha val="12000"/>
               </a:srgbClr>
@@ -16455,7 +16238,7 @@
           </a:bodyPr>
           <a:lstStyle/>
           <a:p>
-            <a:pPr algn="l" indent="0" marL="0">
+            <a:pPr marL="0" indent="0" algn="l">
               <a:buNone/>
             </a:pPr>
             <a:r>
@@ -16496,7 +16279,7 @@
           </a:bodyPr>
           <a:lstStyle/>
           <a:p>
-            <a:pPr algn="l" indent="0" marL="0">
+            <a:pPr marL="0" indent="0" algn="l">
               <a:buNone/>
             </a:pPr>
             <a:r>
@@ -16540,7 +16323,7 @@
             <a:prstDash val="solid"/>
           </a:ln>
           <a:effectLst>
-            <a:outerShdw sx="100000" sy="100000" kx="0" ky="0" algn="bl" rotWithShape="0" blurRad="12700" dist="50800" dir="2700000">
+            <a:outerShdw blurRad="12700" dist="50800" dir="2700000" algn="bl" rotWithShape="0">
               <a:srgbClr val="000000">
                 <a:alpha val="12000"/>
               </a:srgbClr>
@@ -16571,7 +16354,7 @@
           </a:bodyPr>
           <a:lstStyle/>
           <a:p>
-            <a:pPr algn="l" indent="0" marL="0">
+            <a:pPr marL="0" indent="0" algn="l">
               <a:buNone/>
             </a:pPr>
             <a:r>
@@ -16612,7 +16395,7 @@
           </a:bodyPr>
           <a:lstStyle/>
           <a:p>
-            <a:pPr algn="l" indent="0" marL="0">
+            <a:pPr marL="0" indent="0" algn="l">
               <a:buNone/>
             </a:pPr>
             <a:r>
@@ -16656,7 +16439,7 @@
             <a:prstDash val="solid"/>
           </a:ln>
           <a:effectLst>
-            <a:outerShdw sx="100000" sy="100000" kx="0" ky="0" algn="bl" rotWithShape="0" blurRad="12700" dist="50800" dir="2700000">
+            <a:outerShdw blurRad="12700" dist="50800" dir="2700000" algn="bl" rotWithShape="0">
               <a:srgbClr val="000000">
                 <a:alpha val="12000"/>
               </a:srgbClr>
@@ -16687,7 +16470,7 @@
           </a:bodyPr>
           <a:lstStyle/>
           <a:p>
-            <a:pPr algn="l" indent="0" marL="0">
+            <a:pPr marL="0" indent="0" algn="l">
               <a:buNone/>
             </a:pPr>
             <a:r>
@@ -16728,7 +16511,7 @@
           </a:bodyPr>
           <a:lstStyle/>
           <a:p>
-            <a:pPr algn="l" indent="0" marL="0">
+            <a:pPr marL="0" indent="0" algn="l">
               <a:buNone/>
             </a:pPr>
             <a:r>
@@ -16772,7 +16555,7 @@
             <a:prstDash val="solid"/>
           </a:ln>
           <a:effectLst>
-            <a:outerShdw sx="100000" sy="100000" kx="0" ky="0" algn="bl" rotWithShape="0" blurRad="12700" dist="50800" dir="2700000">
+            <a:outerShdw blurRad="12700" dist="50800" dir="2700000" algn="bl" rotWithShape="0">
               <a:srgbClr val="000000">
                 <a:alpha val="12000"/>
               </a:srgbClr>
@@ -16803,7 +16586,7 @@
           </a:bodyPr>
           <a:lstStyle/>
           <a:p>
-            <a:pPr algn="l" indent="0" marL="0">
+            <a:pPr marL="0" indent="0" algn="l">
               <a:buNone/>
             </a:pPr>
             <a:r>
@@ -16844,7 +16627,7 @@
           </a:bodyPr>
           <a:lstStyle/>
           <a:p>
-            <a:pPr algn="l" indent="0" marL="0">
+            <a:pPr marL="0" indent="0" algn="l">
               <a:buNone/>
             </a:pPr>
             <a:r>
@@ -16888,7 +16671,7 @@
             <a:prstDash val="solid"/>
           </a:ln>
           <a:effectLst>
-            <a:outerShdw sx="100000" sy="100000" kx="0" ky="0" algn="bl" rotWithShape="0" blurRad="12700" dist="50800" dir="2700000">
+            <a:outerShdw blurRad="12700" dist="50800" dir="2700000" algn="bl" rotWithShape="0">
               <a:srgbClr val="000000">
                 <a:alpha val="12000"/>
               </a:srgbClr>
@@ -16919,7 +16702,7 @@
           </a:bodyPr>
           <a:lstStyle/>
           <a:p>
-            <a:pPr algn="l" indent="0" marL="0">
+            <a:pPr marL="0" indent="0" algn="l">
               <a:buNone/>
             </a:pPr>
             <a:r>
@@ -16960,7 +16743,7 @@
           </a:bodyPr>
           <a:lstStyle/>
           <a:p>
-            <a:pPr algn="l" indent="0" marL="0">
+            <a:pPr marL="0" indent="0" algn="l">
               <a:buNone/>
             </a:pPr>
             <a:r>
@@ -17004,7 +16787,7 @@
             <a:prstDash val="solid"/>
           </a:ln>
           <a:effectLst>
-            <a:outerShdw sx="100000" sy="100000" kx="0" ky="0" algn="bl" rotWithShape="0" blurRad="12700" dist="50800" dir="2700000">
+            <a:outerShdw blurRad="12700" dist="50800" dir="2700000" algn="bl" rotWithShape="0">
               <a:srgbClr val="000000">
                 <a:alpha val="12000"/>
               </a:srgbClr>
@@ -17035,7 +16818,7 @@
           </a:bodyPr>
           <a:lstStyle/>
           <a:p>
-            <a:pPr algn="l" indent="0" marL="0">
+            <a:pPr marL="0" indent="0" algn="l">
               <a:buNone/>
             </a:pPr>
             <a:r>
@@ -17076,7 +16859,7 @@
           </a:bodyPr>
           <a:lstStyle/>
           <a:p>
-            <a:pPr algn="l" indent="0" marL="0">
+            <a:pPr marL="0" indent="0" algn="l">
               <a:buNone/>
             </a:pPr>
             <a:r>
@@ -17128,7 +16911,7 @@
         <p:spPr>
           <a:xfrm>
             <a:off x="3017520" y="4032504"/>
-            <a:ext cx="1691640" cy="-969264"/>
+            <a:ext cx="1691640" cy="0"/>
           </a:xfrm>
           <a:prstGeom prst="line">
             <a:avLst/>
@@ -17153,7 +16936,7 @@
         <p:spPr>
           <a:xfrm>
             <a:off x="4727448" y="4434840"/>
-            <a:ext cx="758952" cy="-1097280"/>
+            <a:ext cx="758952" cy="0"/>
           </a:xfrm>
           <a:prstGeom prst="line">
             <a:avLst/>
@@ -17178,7 +16961,7 @@
         <p:spPr>
           <a:xfrm>
             <a:off x="7452360" y="2788920"/>
-            <a:ext cx="365760" cy="-585216"/>
+            <a:ext cx="365760" cy="0"/>
           </a:xfrm>
           <a:prstGeom prst="line">
             <a:avLst/>
@@ -17203,7 +16986,7 @@
         <p:spPr>
           <a:xfrm>
             <a:off x="7452360" y="2907792"/>
-            <a:ext cx="1737360" cy="-704088"/>
+            <a:ext cx="1737360" cy="0"/>
           </a:xfrm>
           <a:prstGeom prst="line">
             <a:avLst/>
@@ -17260,6 +17043,7 @@
         <a:solidFill>
           <a:srgbClr val="F7FAFC"/>
         </a:solidFill>
+        <a:effectLst/>
       </p:bgPr>
     </p:bg>
     <p:spTree>
@@ -17382,7 +17166,7 @@
           </a:bodyPr>
           <a:lstStyle/>
           <a:p>
-            <a:pPr algn="l" indent="0" marL="0">
+            <a:pPr marL="0" indent="0" algn="l">
               <a:buNone/>
             </a:pPr>
             <a:r>
@@ -17423,7 +17207,7 @@
           </a:bodyPr>
           <a:lstStyle/>
           <a:p>
-            <a:pPr algn="l" indent="0" marL="0">
+            <a:pPr marL="0" indent="0" algn="l">
               <a:buNone/>
             </a:pPr>
             <a:r>
@@ -17508,7 +17292,7 @@
           <a:bodyPr wrap="square" lIns="0" tIns="0" rIns="0" bIns="0" rtlCol="0" anchor="ctr"/>
           <a:lstStyle/>
           <a:p>
-            <a:pPr indent="0" marL="0">
+            <a:pPr marL="0" indent="0">
               <a:buNone/>
             </a:pPr>
             <a:r>
@@ -17547,7 +17331,7 @@
           <a:bodyPr wrap="square" lIns="0" tIns="0" rIns="0" bIns="0" rtlCol="0" anchor="ctr"/>
           <a:lstStyle/>
           <a:p>
-            <a:pPr algn="r" indent="0" marL="0">
+            <a:pPr marL="0" indent="0" algn="r">
               <a:buNone/>
             </a:pPr>
             <a:r>
@@ -17588,7 +17372,7 @@
           </a:bodyPr>
           <a:lstStyle/>
           <a:p>
-            <a:pPr algn="l" indent="0" marL="0">
+            <a:pPr marL="0" indent="0" algn="l">
               <a:buNone/>
             </a:pPr>
             <a:r>
@@ -17632,7 +17416,7 @@
             <a:prstDash val="solid"/>
           </a:ln>
           <a:effectLst>
-            <a:outerShdw sx="100000" sy="100000" kx="0" ky="0" algn="bl" rotWithShape="0" blurRad="12700" dist="50800" dir="2700000">
+            <a:outerShdw blurRad="12700" dist="50800" dir="2700000" algn="bl" rotWithShape="0">
               <a:srgbClr val="000000">
                 <a:alpha val="12000"/>
               </a:srgbClr>
@@ -17663,7 +17447,7 @@
           </a:bodyPr>
           <a:lstStyle/>
           <a:p>
-            <a:pPr algn="l" indent="0" marL="0">
+            <a:pPr marL="0" indent="0" algn="l">
               <a:buNone/>
             </a:pPr>
             <a:r>
@@ -17704,7 +17488,7 @@
           </a:bodyPr>
           <a:lstStyle/>
           <a:p>
-            <a:pPr algn="l" indent="0" marL="0">
+            <a:pPr marL="0" indent="0" algn="l">
               <a:buNone/>
             </a:pPr>
             <a:r>
@@ -17770,7 +17554,7 @@
           <a:bodyPr wrap="square" lIns="0" tIns="0" rIns="0" bIns="0" rtlCol="0" anchor="ctr"/>
           <a:lstStyle/>
           <a:p>
-            <a:pPr algn="ctr" indent="0" marL="0">
+            <a:pPr marL="0" indent="0" algn="ctr">
               <a:buNone/>
             </a:pPr>
             <a:r>
@@ -17839,7 +17623,7 @@
             <a:prstDash val="solid"/>
           </a:ln>
           <a:effectLst>
-            <a:outerShdw sx="100000" sy="100000" kx="0" ky="0" algn="bl" rotWithShape="0" blurRad="12700" dist="50800" dir="2700000">
+            <a:outerShdw blurRad="12700" dist="50800" dir="2700000" algn="bl" rotWithShape="0">
               <a:srgbClr val="000000">
                 <a:alpha val="12000"/>
               </a:srgbClr>
@@ -17870,7 +17654,7 @@
           </a:bodyPr>
           <a:lstStyle/>
           <a:p>
-            <a:pPr algn="l" indent="0" marL="0">
+            <a:pPr marL="0" indent="0" algn="l">
               <a:buNone/>
             </a:pPr>
             <a:r>
@@ -17911,7 +17695,7 @@
           </a:bodyPr>
           <a:lstStyle/>
           <a:p>
-            <a:pPr algn="l" indent="0" marL="0">
+            <a:pPr marL="0" indent="0" algn="l">
               <a:buNone/>
             </a:pPr>
             <a:r>
@@ -17977,7 +17761,7 @@
           <a:bodyPr wrap="square" lIns="0" tIns="0" rIns="0" bIns="0" rtlCol="0" anchor="ctr"/>
           <a:lstStyle/>
           <a:p>
-            <a:pPr algn="ctr" indent="0" marL="0">
+            <a:pPr marL="0" indent="0" algn="ctr">
               <a:buNone/>
             </a:pPr>
             <a:r>
@@ -18046,7 +17830,7 @@
             <a:prstDash val="solid"/>
           </a:ln>
           <a:effectLst>
-            <a:outerShdw sx="100000" sy="100000" kx="0" ky="0" algn="bl" rotWithShape="0" blurRad="12700" dist="50800" dir="2700000">
+            <a:outerShdw blurRad="12700" dist="50800" dir="2700000" algn="bl" rotWithShape="0">
               <a:srgbClr val="000000">
                 <a:alpha val="12000"/>
               </a:srgbClr>
@@ -18077,7 +17861,7 @@
           </a:bodyPr>
           <a:lstStyle/>
           <a:p>
-            <a:pPr algn="l" indent="0" marL="0">
+            <a:pPr marL="0" indent="0" algn="l">
               <a:buNone/>
             </a:pPr>
             <a:r>
@@ -18118,7 +17902,7 @@
           </a:bodyPr>
           <a:lstStyle/>
           <a:p>
-            <a:pPr algn="l" indent="0" marL="0">
+            <a:pPr marL="0" indent="0" algn="l">
               <a:buNone/>
             </a:pPr>
             <a:r>
@@ -18184,7 +17968,7 @@
           <a:bodyPr wrap="square" lIns="0" tIns="0" rIns="0" bIns="0" rtlCol="0" anchor="ctr"/>
           <a:lstStyle/>
           <a:p>
-            <a:pPr algn="ctr" indent="0" marL="0">
+            <a:pPr marL="0" indent="0" algn="ctr">
               <a:buNone/>
             </a:pPr>
             <a:r>
@@ -18253,7 +18037,7 @@
             <a:prstDash val="solid"/>
           </a:ln>
           <a:effectLst>
-            <a:outerShdw sx="100000" sy="100000" kx="0" ky="0" algn="bl" rotWithShape="0" blurRad="12700" dist="50800" dir="2700000">
+            <a:outerShdw blurRad="12700" dist="50800" dir="2700000" algn="bl" rotWithShape="0">
               <a:srgbClr val="000000">
                 <a:alpha val="12000"/>
               </a:srgbClr>
@@ -18284,7 +18068,7 @@
           </a:bodyPr>
           <a:lstStyle/>
           <a:p>
-            <a:pPr algn="l" indent="0" marL="0">
+            <a:pPr marL="0" indent="0" algn="l">
               <a:buNone/>
             </a:pPr>
             <a:r>
@@ -18325,7 +18109,7 @@
           </a:bodyPr>
           <a:lstStyle/>
           <a:p>
-            <a:pPr algn="l" indent="0" marL="0">
+            <a:pPr marL="0" indent="0" algn="l">
               <a:buNone/>
             </a:pPr>
             <a:r>
@@ -18391,7 +18175,7 @@
           <a:bodyPr wrap="square" lIns="0" tIns="0" rIns="0" bIns="0" rtlCol="0" anchor="ctr"/>
           <a:lstStyle/>
           <a:p>
-            <a:pPr algn="ctr" indent="0" marL="0">
+            <a:pPr marL="0" indent="0" algn="ctr">
               <a:buNone/>
             </a:pPr>
             <a:r>
@@ -18460,7 +18244,7 @@
             <a:prstDash val="solid"/>
           </a:ln>
           <a:effectLst>
-            <a:outerShdw sx="100000" sy="100000" kx="0" ky="0" algn="bl" rotWithShape="0" blurRad="12700" dist="50800" dir="2700000">
+            <a:outerShdw blurRad="12700" dist="50800" dir="2700000" algn="bl" rotWithShape="0">
               <a:srgbClr val="000000">
                 <a:alpha val="12000"/>
               </a:srgbClr>
@@ -18491,7 +18275,7 @@
           </a:bodyPr>
           <a:lstStyle/>
           <a:p>
-            <a:pPr algn="l" indent="0" marL="0">
+            <a:pPr marL="0" indent="0" algn="l">
               <a:buNone/>
             </a:pPr>
             <a:r>
@@ -18532,7 +18316,7 @@
           </a:bodyPr>
           <a:lstStyle/>
           <a:p>
-            <a:pPr algn="l" indent="0" marL="0">
+            <a:pPr marL="0" indent="0" algn="l">
               <a:buNone/>
             </a:pPr>
             <a:r>
@@ -18598,7 +18382,7 @@
           <a:bodyPr wrap="square" lIns="0" tIns="0" rIns="0" bIns="0" rtlCol="0" anchor="ctr"/>
           <a:lstStyle/>
           <a:p>
-            <a:pPr algn="ctr" indent="0" marL="0">
+            <a:pPr marL="0" indent="0" algn="ctr">
               <a:buNone/>
             </a:pPr>
             <a:r>
@@ -18642,7 +18426,7 @@
             <a:prstDash val="solid"/>
           </a:ln>
           <a:effectLst>
-            <a:outerShdw sx="100000" sy="100000" kx="0" ky="0" algn="bl" rotWithShape="0" blurRad="12700" dist="50800" dir="2700000">
+            <a:outerShdw blurRad="12700" dist="50800" dir="2700000" algn="bl" rotWithShape="0">
               <a:srgbClr val="000000">
                 <a:alpha val="12000"/>
               </a:srgbClr>
@@ -18673,7 +18457,7 @@
           </a:bodyPr>
           <a:lstStyle/>
           <a:p>
-            <a:pPr algn="l" indent="0" marL="0">
+            <a:pPr marL="0" indent="0" algn="l">
               <a:buNone/>
             </a:pPr>
             <a:r>
@@ -18714,7 +18498,7 @@
           </a:bodyPr>
           <a:lstStyle/>
           <a:p>
-            <a:pPr algn="l" indent="0" marL="0">
+            <a:pPr marL="0" indent="0" algn="l">
               <a:buNone/>
             </a:pPr>
             <a:r>
@@ -18748,6 +18532,7 @@
         <a:solidFill>
           <a:srgbClr val="F7FAFC"/>
         </a:solidFill>
+        <a:effectLst/>
       </p:bgPr>
     </p:bg>
     <p:spTree>
@@ -18870,7 +18655,7 @@
           </a:bodyPr>
           <a:lstStyle/>
           <a:p>
-            <a:pPr algn="l" indent="0" marL="0">
+            <a:pPr marL="0" indent="0" algn="l">
               <a:buNone/>
             </a:pPr>
             <a:r>
@@ -18911,7 +18696,7 @@
           </a:bodyPr>
           <a:lstStyle/>
           <a:p>
-            <a:pPr algn="l" indent="0" marL="0">
+            <a:pPr marL="0" indent="0" algn="l">
               <a:buNone/>
             </a:pPr>
             <a:r>
@@ -18996,7 +18781,7 @@
           <a:bodyPr wrap="square" lIns="0" tIns="0" rIns="0" bIns="0" rtlCol="0" anchor="ctr"/>
           <a:lstStyle/>
           <a:p>
-            <a:pPr indent="0" marL="0">
+            <a:pPr marL="0" indent="0">
               <a:buNone/>
             </a:pPr>
             <a:r>
@@ -19035,7 +18820,7 @@
           <a:bodyPr wrap="square" lIns="0" tIns="0" rIns="0" bIns="0" rtlCol="0" anchor="ctr"/>
           <a:lstStyle/>
           <a:p>
-            <a:pPr algn="r" indent="0" marL="0">
+            <a:pPr marL="0" indent="0" algn="r">
               <a:buNone/>
             </a:pPr>
             <a:r>
@@ -19076,7 +18861,7 @@
           </a:bodyPr>
           <a:lstStyle/>
           <a:p>
-            <a:pPr algn="l" indent="0" marL="0">
+            <a:pPr marL="0" indent="0" algn="l">
               <a:buNone/>
             </a:pPr>
             <a:r>
@@ -19120,7 +18905,7 @@
             <a:prstDash val="solid"/>
           </a:ln>
           <a:effectLst>
-            <a:outerShdw sx="100000" sy="100000" kx="0" ky="0" algn="bl" rotWithShape="0" blurRad="12700" dist="50800" dir="2700000">
+            <a:outerShdw blurRad="12700" dist="50800" dir="2700000" algn="bl" rotWithShape="0">
               <a:srgbClr val="000000">
                 <a:alpha val="12000"/>
               </a:srgbClr>
@@ -19178,7 +18963,7 @@
           </a:bodyPr>
           <a:lstStyle/>
           <a:p>
-            <a:pPr algn="l" indent="0" marL="0">
+            <a:pPr marL="0" indent="0" algn="l">
               <a:buNone/>
             </a:pPr>
             <a:r>
@@ -19219,7 +19004,7 @@
           </a:bodyPr>
           <a:lstStyle/>
           <a:p>
-            <a:pPr algn="l" indent="0" marL="0">
+            <a:pPr marL="0" indent="0" algn="l">
               <a:buNone/>
             </a:pPr>
             <a:r>
@@ -19236,7 +19021,7 @@
             <a:endParaRPr lang="en-US" sz="670" dirty="0"/>
           </a:p>
           <a:p>
-            <a:pPr algn="l" indent="0" marL="0">
+            <a:pPr marL="0" indent="0" algn="l">
               <a:buNone/>
             </a:pPr>
             <a:r>
@@ -19253,7 +19038,7 @@
             <a:endParaRPr lang="en-US" sz="670" dirty="0"/>
           </a:p>
           <a:p>
-            <a:pPr algn="l" indent="0" marL="0">
+            <a:pPr marL="0" indent="0" algn="l">
               <a:buNone/>
             </a:pPr>
             <a:r>
@@ -19270,7 +19055,7 @@
             <a:endParaRPr lang="en-US" sz="670" dirty="0"/>
           </a:p>
           <a:p>
-            <a:pPr algn="l" indent="0" marL="0">
+            <a:pPr marL="0" indent="0" algn="l">
               <a:buNone/>
             </a:pPr>
             <a:r>
@@ -19287,7 +19072,7 @@
             <a:endParaRPr lang="en-US" sz="670" dirty="0"/>
           </a:p>
           <a:p>
-            <a:pPr algn="l" indent="0" marL="0">
+            <a:pPr marL="0" indent="0" algn="l">
               <a:buNone/>
             </a:pPr>
             <a:r>
@@ -19304,7 +19089,7 @@
             <a:endParaRPr lang="en-US" sz="670" dirty="0"/>
           </a:p>
           <a:p>
-            <a:pPr algn="l" indent="0" marL="0">
+            <a:pPr marL="0" indent="0" algn="l">
               <a:buNone/>
             </a:pPr>
             <a:r>
@@ -19321,7 +19106,7 @@
             <a:endParaRPr lang="en-US" sz="670" dirty="0"/>
           </a:p>
           <a:p>
-            <a:pPr algn="l" indent="0" marL="0">
+            <a:pPr marL="0" indent="0" algn="l">
               <a:buNone/>
             </a:pPr>
             <a:r>
@@ -19365,7 +19150,7 @@
             <a:prstDash val="solid"/>
           </a:ln>
           <a:effectLst>
-            <a:outerShdw sx="100000" sy="100000" kx="0" ky="0" algn="bl" rotWithShape="0" blurRad="12700" dist="50800" dir="2700000">
+            <a:outerShdw blurRad="12700" dist="50800" dir="2700000" algn="bl" rotWithShape="0">
               <a:srgbClr val="000000">
                 <a:alpha val="12000"/>
               </a:srgbClr>
@@ -19423,7 +19208,7 @@
           </a:bodyPr>
           <a:lstStyle/>
           <a:p>
-            <a:pPr algn="l" indent="0" marL="0">
+            <a:pPr marL="0" indent="0" algn="l">
               <a:buNone/>
             </a:pPr>
             <a:r>
@@ -19464,7 +19249,7 @@
           </a:bodyPr>
           <a:lstStyle/>
           <a:p>
-            <a:pPr algn="l" indent="0" marL="0">
+            <a:pPr marL="0" indent="0" algn="l">
               <a:buNone/>
             </a:pPr>
             <a:r>
@@ -19481,7 +19266,7 @@
             <a:endParaRPr lang="en-US" sz="670" dirty="0"/>
           </a:p>
           <a:p>
-            <a:pPr algn="l" indent="0" marL="0">
+            <a:pPr marL="0" indent="0" algn="l">
               <a:buNone/>
             </a:pPr>
             <a:r>
@@ -19498,7 +19283,7 @@
             <a:endParaRPr lang="en-US" sz="670" dirty="0"/>
           </a:p>
           <a:p>
-            <a:pPr algn="l" indent="0" marL="0">
+            <a:pPr marL="0" indent="0" algn="l">
               <a:buNone/>
             </a:pPr>
             <a:r>
@@ -19515,7 +19300,7 @@
             <a:endParaRPr lang="en-US" sz="670" dirty="0"/>
           </a:p>
           <a:p>
-            <a:pPr algn="l" indent="0" marL="0">
+            <a:pPr marL="0" indent="0" algn="l">
               <a:buNone/>
             </a:pPr>
             <a:r>
@@ -19532,7 +19317,7 @@
             <a:endParaRPr lang="en-US" sz="670" dirty="0"/>
           </a:p>
           <a:p>
-            <a:pPr algn="l" indent="0" marL="0">
+            <a:pPr marL="0" indent="0" algn="l">
               <a:buNone/>
             </a:pPr>
             <a:r>
@@ -19549,7 +19334,7 @@
             <a:endParaRPr lang="en-US" sz="670" dirty="0"/>
           </a:p>
           <a:p>
-            <a:pPr algn="l" indent="0" marL="0">
+            <a:pPr marL="0" indent="0" algn="l">
               <a:buNone/>
             </a:pPr>
             <a:r>
@@ -19566,7 +19351,7 @@
             <a:endParaRPr lang="en-US" sz="670" dirty="0"/>
           </a:p>
           <a:p>
-            <a:pPr algn="l" indent="0" marL="0">
+            <a:pPr marL="0" indent="0" algn="l">
               <a:buNone/>
             </a:pPr>
             <a:r>
@@ -19610,7 +19395,7 @@
             <a:prstDash val="solid"/>
           </a:ln>
           <a:effectLst>
-            <a:outerShdw sx="100000" sy="100000" kx="0" ky="0" algn="bl" rotWithShape="0" blurRad="12700" dist="50800" dir="2700000">
+            <a:outerShdw blurRad="12700" dist="50800" dir="2700000" algn="bl" rotWithShape="0">
               <a:srgbClr val="000000">
                 <a:alpha val="12000"/>
               </a:srgbClr>
@@ -19668,7 +19453,7 @@
           </a:bodyPr>
           <a:lstStyle/>
           <a:p>
-            <a:pPr algn="l" indent="0" marL="0">
+            <a:pPr marL="0" indent="0" algn="l">
               <a:buNone/>
             </a:pPr>
             <a:r>
@@ -19709,7 +19494,7 @@
           </a:bodyPr>
           <a:lstStyle/>
           <a:p>
-            <a:pPr algn="l" indent="0" marL="0">
+            <a:pPr marL="0" indent="0" algn="l">
               <a:buNone/>
             </a:pPr>
             <a:r>
@@ -19726,7 +19511,7 @@
             <a:endParaRPr lang="en-US" sz="670" dirty="0"/>
           </a:p>
           <a:p>
-            <a:pPr algn="l" indent="0" marL="0">
+            <a:pPr marL="0" indent="0" algn="l">
               <a:buNone/>
             </a:pPr>
             <a:r>
@@ -19743,7 +19528,7 @@
             <a:endParaRPr lang="en-US" sz="670" dirty="0"/>
           </a:p>
           <a:p>
-            <a:pPr algn="l" indent="0" marL="0">
+            <a:pPr marL="0" indent="0" algn="l">
               <a:buNone/>
             </a:pPr>
             <a:r>
@@ -19760,7 +19545,7 @@
             <a:endParaRPr lang="en-US" sz="670" dirty="0"/>
           </a:p>
           <a:p>
-            <a:pPr algn="l" indent="0" marL="0">
+            <a:pPr marL="0" indent="0" algn="l">
               <a:buNone/>
             </a:pPr>
             <a:r>
@@ -19777,7 +19562,7 @@
             <a:endParaRPr lang="en-US" sz="670" dirty="0"/>
           </a:p>
           <a:p>
-            <a:pPr algn="l" indent="0" marL="0">
+            <a:pPr marL="0" indent="0" algn="l">
               <a:buNone/>
             </a:pPr>
             <a:r>
@@ -19794,7 +19579,7 @@
             <a:endParaRPr lang="en-US" sz="670" dirty="0"/>
           </a:p>
           <a:p>
-            <a:pPr algn="l" indent="0" marL="0">
+            <a:pPr marL="0" indent="0" algn="l">
               <a:buNone/>
             </a:pPr>
             <a:r>
@@ -19811,7 +19596,7 @@
             <a:endParaRPr lang="en-US" sz="670" dirty="0"/>
           </a:p>
           <a:p>
-            <a:pPr algn="l" indent="0" marL="0">
+            <a:pPr marL="0" indent="0" algn="l">
               <a:buNone/>
             </a:pPr>
             <a:r>
@@ -19855,7 +19640,7 @@
             <a:prstDash val="solid"/>
           </a:ln>
           <a:effectLst>
-            <a:outerShdw sx="100000" sy="100000" kx="0" ky="0" algn="bl" rotWithShape="0" blurRad="12700" dist="50800" dir="2700000">
+            <a:outerShdw blurRad="12700" dist="50800" dir="2700000" algn="bl" rotWithShape="0">
               <a:srgbClr val="000000">
                 <a:alpha val="12000"/>
               </a:srgbClr>
@@ -19913,7 +19698,7 @@
           </a:bodyPr>
           <a:lstStyle/>
           <a:p>
-            <a:pPr algn="l" indent="0" marL="0">
+            <a:pPr marL="0" indent="0" algn="l">
               <a:buNone/>
             </a:pPr>
             <a:r>
@@ -19954,7 +19739,7 @@
           </a:bodyPr>
           <a:lstStyle/>
           <a:p>
-            <a:pPr algn="l" indent="0" marL="0">
+            <a:pPr marL="0" indent="0" algn="l">
               <a:buNone/>
             </a:pPr>
             <a:r>
@@ -19971,7 +19756,7 @@
             <a:endParaRPr lang="en-US" sz="670" dirty="0"/>
           </a:p>
           <a:p>
-            <a:pPr algn="l" indent="0" marL="0">
+            <a:pPr marL="0" indent="0" algn="l">
               <a:buNone/>
             </a:pPr>
             <a:r>
@@ -19988,7 +19773,7 @@
             <a:endParaRPr lang="en-US" sz="670" dirty="0"/>
           </a:p>
           <a:p>
-            <a:pPr algn="l" indent="0" marL="0">
+            <a:pPr marL="0" indent="0" algn="l">
               <a:buNone/>
             </a:pPr>
             <a:r>
@@ -20005,7 +19790,7 @@
             <a:endParaRPr lang="en-US" sz="670" dirty="0"/>
           </a:p>
           <a:p>
-            <a:pPr algn="l" indent="0" marL="0">
+            <a:pPr marL="0" indent="0" algn="l">
               <a:buNone/>
             </a:pPr>
             <a:r>
@@ -20148,7 +19933,7 @@
           </a:bodyPr>
           <a:lstStyle/>
           <a:p>
-            <a:pPr algn="l" indent="0" marL="0">
+            <a:pPr marL="0" indent="0" algn="l">
               <a:buNone/>
             </a:pPr>
             <a:r>
@@ -20189,7 +19974,7 @@
           </a:bodyPr>
           <a:lstStyle/>
           <a:p>
-            <a:pPr algn="l" indent="0" marL="0">
+            <a:pPr marL="0" indent="0" algn="l">
               <a:buNone/>
             </a:pPr>
             <a:r>
@@ -20223,6 +20008,7 @@
         <a:solidFill>
           <a:srgbClr val="F7FAFC"/>
         </a:solidFill>
+        <a:effectLst/>
       </p:bgPr>
     </p:bg>
     <p:spTree>
@@ -20345,7 +20131,7 @@
           </a:bodyPr>
           <a:lstStyle/>
           <a:p>
-            <a:pPr algn="l" indent="0" marL="0">
+            <a:pPr marL="0" indent="0" algn="l">
               <a:buNone/>
             </a:pPr>
             <a:r>
@@ -20386,7 +20172,7 @@
           </a:bodyPr>
           <a:lstStyle/>
           <a:p>
-            <a:pPr algn="l" indent="0" marL="0">
+            <a:pPr marL="0" indent="0" algn="l">
               <a:buNone/>
             </a:pPr>
             <a:r>
@@ -20471,7 +20257,7 @@
           <a:bodyPr wrap="square" lIns="0" tIns="0" rIns="0" bIns="0" rtlCol="0" anchor="ctr"/>
           <a:lstStyle/>
           <a:p>
-            <a:pPr indent="0" marL="0">
+            <a:pPr marL="0" indent="0">
               <a:buNone/>
             </a:pPr>
             <a:r>
@@ -20510,7 +20296,7 @@
           <a:bodyPr wrap="square" lIns="0" tIns="0" rIns="0" bIns="0" rtlCol="0" anchor="ctr"/>
           <a:lstStyle/>
           <a:p>
-            <a:pPr algn="r" indent="0" marL="0">
+            <a:pPr marL="0" indent="0" algn="r">
               <a:buNone/>
             </a:pPr>
             <a:r>
@@ -20551,7 +20337,7 @@
           </a:bodyPr>
           <a:lstStyle/>
           <a:p>
-            <a:pPr algn="l" indent="0" marL="0">
+            <a:pPr marL="0" indent="0" algn="l">
               <a:buNone/>
             </a:pPr>
             <a:r>
@@ -20695,7 +20481,7 @@
             <a:prstDash val="solid"/>
           </a:ln>
           <a:effectLst>
-            <a:outerShdw sx="100000" sy="100000" kx="0" ky="0" algn="bl" rotWithShape="0" blurRad="12700" dist="50800" dir="2700000">
+            <a:outerShdw blurRad="12700" dist="50800" dir="2700000" algn="bl" rotWithShape="0">
               <a:srgbClr val="000000">
                 <a:alpha val="12000"/>
               </a:srgbClr>
@@ -20753,7 +20539,7 @@
           </a:bodyPr>
           <a:lstStyle/>
           <a:p>
-            <a:pPr algn="l" indent="0" marL="0">
+            <a:pPr marL="0" indent="0" algn="l">
               <a:buNone/>
             </a:pPr>
             <a:r>
@@ -20794,7 +20580,7 @@
           </a:bodyPr>
           <a:lstStyle/>
           <a:p>
-            <a:pPr algn="l" indent="0" marL="0">
+            <a:pPr marL="0" indent="0" algn="l">
               <a:buNone/>
             </a:pPr>
             <a:r>
@@ -20811,7 +20597,7 @@
             <a:endParaRPr lang="en-US" sz="670" dirty="0"/>
           </a:p>
           <a:p>
-            <a:pPr algn="l" indent="0" marL="0">
+            <a:pPr marL="0" indent="0" algn="l">
               <a:buNone/>
             </a:pPr>
             <a:r>
@@ -20828,7 +20614,7 @@
             <a:endParaRPr lang="en-US" sz="670" dirty="0"/>
           </a:p>
           <a:p>
-            <a:pPr algn="l" indent="0" marL="0">
+            <a:pPr marL="0" indent="0" algn="l">
               <a:buNone/>
             </a:pPr>
             <a:r>
@@ -20872,7 +20658,7 @@
             <a:prstDash val="solid"/>
           </a:ln>
           <a:effectLst>
-            <a:outerShdw sx="100000" sy="100000" kx="0" ky="0" algn="bl" rotWithShape="0" blurRad="12700" dist="50800" dir="2700000">
+            <a:outerShdw blurRad="12700" dist="50800" dir="2700000" algn="bl" rotWithShape="0">
               <a:srgbClr val="000000">
                 <a:alpha val="12000"/>
               </a:srgbClr>
@@ -20930,7 +20716,7 @@
           </a:bodyPr>
           <a:lstStyle/>
           <a:p>
-            <a:pPr algn="l" indent="0" marL="0">
+            <a:pPr marL="0" indent="0" algn="l">
               <a:buNone/>
             </a:pPr>
             <a:r>
@@ -20971,7 +20757,7 @@
           </a:bodyPr>
           <a:lstStyle/>
           <a:p>
-            <a:pPr algn="l" indent="0" marL="0">
+            <a:pPr marL="0" indent="0" algn="l">
               <a:buNone/>
             </a:pPr>
             <a:r>
@@ -20988,7 +20774,7 @@
             <a:endParaRPr lang="en-US" sz="670" dirty="0"/>
           </a:p>
           <a:p>
-            <a:pPr algn="l" indent="0" marL="0">
+            <a:pPr marL="0" indent="0" algn="l">
               <a:buNone/>
             </a:pPr>
             <a:r>
@@ -21005,7 +20791,7 @@
             <a:endParaRPr lang="en-US" sz="670" dirty="0"/>
           </a:p>
           <a:p>
-            <a:pPr algn="l" indent="0" marL="0">
+            <a:pPr marL="0" indent="0" algn="l">
               <a:buNone/>
             </a:pPr>
             <a:r>
@@ -21022,7 +20808,7 @@
             <a:endParaRPr lang="en-US" sz="670" dirty="0"/>
           </a:p>
           <a:p>
-            <a:pPr algn="l" indent="0" marL="0">
+            <a:pPr marL="0" indent="0" algn="l">
               <a:buNone/>
             </a:pPr>
             <a:r>
@@ -21039,7 +20825,7 @@
             <a:endParaRPr lang="en-US" sz="670" dirty="0"/>
           </a:p>
           <a:p>
-            <a:pPr algn="l" indent="0" marL="0">
+            <a:pPr marL="0" indent="0" algn="l">
               <a:buNone/>
             </a:pPr>
             <a:r>
@@ -21083,7 +20869,7 @@
             <a:prstDash val="solid"/>
           </a:ln>
           <a:effectLst>
-            <a:outerShdw sx="100000" sy="100000" kx="0" ky="0" algn="bl" rotWithShape="0" blurRad="12700" dist="50800" dir="2700000">
+            <a:outerShdw blurRad="12700" dist="50800" dir="2700000" algn="bl" rotWithShape="0">
               <a:srgbClr val="000000">
                 <a:alpha val="12000"/>
               </a:srgbClr>
@@ -21141,7 +20927,7 @@
           </a:bodyPr>
           <a:lstStyle/>
           <a:p>
-            <a:pPr algn="l" indent="0" marL="0">
+            <a:pPr marL="0" indent="0" algn="l">
               <a:buNone/>
             </a:pPr>
             <a:r>
@@ -21182,7 +20968,7 @@
           </a:bodyPr>
           <a:lstStyle/>
           <a:p>
-            <a:pPr algn="l" indent="0" marL="0">
+            <a:pPr marL="0" indent="0" algn="l">
               <a:buNone/>
             </a:pPr>
             <a:r>
@@ -21199,7 +20985,7 @@
             <a:endParaRPr lang="en-US" sz="670" dirty="0"/>
           </a:p>
           <a:p>
-            <a:pPr algn="l" indent="0" marL="0">
+            <a:pPr marL="0" indent="0" algn="l">
               <a:buNone/>
             </a:pPr>
             <a:r>
@@ -21216,7 +21002,7 @@
             <a:endParaRPr lang="en-US" sz="670" dirty="0"/>
           </a:p>
           <a:p>
-            <a:pPr algn="l" indent="0" marL="0">
+            <a:pPr marL="0" indent="0" algn="l">
               <a:buNone/>
             </a:pPr>
             <a:r>
@@ -21233,7 +21019,7 @@
             <a:endParaRPr lang="en-US" sz="670" dirty="0"/>
           </a:p>
           <a:p>
-            <a:pPr algn="l" indent="0" marL="0">
+            <a:pPr marL="0" indent="0" algn="l">
               <a:buNone/>
             </a:pPr>
             <a:r>
@@ -21277,7 +21063,7 @@
             <a:prstDash val="solid"/>
           </a:ln>
           <a:effectLst>
-            <a:outerShdw sx="100000" sy="100000" kx="0" ky="0" algn="bl" rotWithShape="0" blurRad="12700" dist="50800" dir="2700000">
+            <a:outerShdw blurRad="12700" dist="50800" dir="2700000" algn="bl" rotWithShape="0">
               <a:srgbClr val="000000">
                 <a:alpha val="12000"/>
               </a:srgbClr>
@@ -21335,7 +21121,7 @@
           </a:bodyPr>
           <a:lstStyle/>
           <a:p>
-            <a:pPr algn="l" indent="0" marL="0">
+            <a:pPr marL="0" indent="0" algn="l">
               <a:buNone/>
             </a:pPr>
             <a:r>
@@ -21376,7 +21162,7 @@
           </a:bodyPr>
           <a:lstStyle/>
           <a:p>
-            <a:pPr algn="l" indent="0" marL="0">
+            <a:pPr marL="0" indent="0" algn="l">
               <a:buNone/>
             </a:pPr>
             <a:r>
@@ -21393,7 +21179,7 @@
             <a:endParaRPr lang="en-US" sz="670" dirty="0"/>
           </a:p>
           <a:p>
-            <a:pPr algn="l" indent="0" marL="0">
+            <a:pPr marL="0" indent="0" algn="l">
               <a:buNone/>
             </a:pPr>
             <a:r>
@@ -21410,7 +21196,7 @@
             <a:endParaRPr lang="en-US" sz="670" dirty="0"/>
           </a:p>
           <a:p>
-            <a:pPr algn="l" indent="0" marL="0">
+            <a:pPr marL="0" indent="0" algn="l">
               <a:buNone/>
             </a:pPr>
             <a:r>
@@ -21427,7 +21213,7 @@
             <a:endParaRPr lang="en-US" sz="670" dirty="0"/>
           </a:p>
           <a:p>
-            <a:pPr algn="l" indent="0" marL="0">
+            <a:pPr marL="0" indent="0" algn="l">
               <a:buNone/>
             </a:pPr>
             <a:r>
@@ -21471,7 +21257,7 @@
             <a:prstDash val="solid"/>
           </a:ln>
           <a:effectLst>
-            <a:outerShdw sx="100000" sy="100000" kx="0" ky="0" algn="bl" rotWithShape="0" blurRad="12700" dist="50800" dir="2700000">
+            <a:outerShdw blurRad="12700" dist="50800" dir="2700000" algn="bl" rotWithShape="0">
               <a:srgbClr val="000000">
                 <a:alpha val="12000"/>
               </a:srgbClr>
@@ -21529,7 +21315,7 @@
           </a:bodyPr>
           <a:lstStyle/>
           <a:p>
-            <a:pPr algn="l" indent="0" marL="0">
+            <a:pPr marL="0" indent="0" algn="l">
               <a:buNone/>
             </a:pPr>
             <a:r>
@@ -21570,7 +21356,7 @@
           </a:bodyPr>
           <a:lstStyle/>
           <a:p>
-            <a:pPr algn="l" indent="0" marL="0">
+            <a:pPr marL="0" indent="0" algn="l">
               <a:buNone/>
             </a:pPr>
             <a:r>
@@ -21587,7 +21373,7 @@
             <a:endParaRPr lang="en-US" sz="670" dirty="0"/>
           </a:p>
           <a:p>
-            <a:pPr algn="l" indent="0" marL="0">
+            <a:pPr marL="0" indent="0" algn="l">
               <a:buNone/>
             </a:pPr>
             <a:r>
@@ -21604,7 +21390,7 @@
             <a:endParaRPr lang="en-US" sz="670" dirty="0"/>
           </a:p>
           <a:p>
-            <a:pPr algn="l" indent="0" marL="0">
+            <a:pPr marL="0" indent="0" algn="l">
               <a:buNone/>
             </a:pPr>
             <a:r>
@@ -21621,7 +21407,7 @@
             <a:endParaRPr lang="en-US" sz="670" dirty="0"/>
           </a:p>
           <a:p>
-            <a:pPr algn="l" indent="0" marL="0">
+            <a:pPr marL="0" indent="0" algn="l">
               <a:buNone/>
             </a:pPr>
             <a:r>
@@ -21638,7 +21424,7 @@
             <a:endParaRPr lang="en-US" sz="670" dirty="0"/>
           </a:p>
           <a:p>
-            <a:pPr algn="l" indent="0" marL="0">
+            <a:pPr marL="0" indent="0" algn="l">
               <a:buNone/>
             </a:pPr>
             <a:r>
@@ -21682,7 +21468,7 @@
             <a:prstDash val="solid"/>
           </a:ln>
           <a:effectLst>
-            <a:outerShdw sx="100000" sy="100000" kx="0" ky="0" algn="bl" rotWithShape="0" blurRad="12700" dist="50800" dir="2700000">
+            <a:outerShdw blurRad="12700" dist="50800" dir="2700000" algn="bl" rotWithShape="0">
               <a:srgbClr val="000000">
                 <a:alpha val="12000"/>
               </a:srgbClr>
@@ -21740,7 +21526,7 @@
           </a:bodyPr>
           <a:lstStyle/>
           <a:p>
-            <a:pPr algn="l" indent="0" marL="0">
+            <a:pPr marL="0" indent="0" algn="l">
               <a:buNone/>
             </a:pPr>
             <a:r>
@@ -21781,7 +21567,7 @@
           </a:bodyPr>
           <a:lstStyle/>
           <a:p>
-            <a:pPr algn="l" indent="0" marL="0">
+            <a:pPr marL="0" indent="0" algn="l">
               <a:buNone/>
             </a:pPr>
             <a:r>
@@ -21798,7 +21584,7 @@
             <a:endParaRPr lang="en-US" sz="670" dirty="0"/>
           </a:p>
           <a:p>
-            <a:pPr algn="l" indent="0" marL="0">
+            <a:pPr marL="0" indent="0" algn="l">
               <a:buNone/>
             </a:pPr>
             <a:r>
@@ -21815,7 +21601,7 @@
             <a:endParaRPr lang="en-US" sz="670" dirty="0"/>
           </a:p>
           <a:p>
-            <a:pPr algn="l" indent="0" marL="0">
+            <a:pPr marL="0" indent="0" algn="l">
               <a:buNone/>
             </a:pPr>
             <a:r>
@@ -21842,7 +21628,7 @@
         <p:spPr>
           <a:xfrm>
             <a:off x="7726680" y="4946904"/>
-            <a:ext cx="-548640" cy="-45720"/>
+            <a:ext cx="0" cy="0"/>
           </a:xfrm>
           <a:prstGeom prst="line">
             <a:avLst/>
@@ -21958,7 +21744,7 @@
           </a:bodyPr>
           <a:lstStyle/>
           <a:p>
-            <a:pPr algn="l" indent="0" marL="0">
+            <a:pPr marL="0" indent="0" algn="l">
               <a:buNone/>
             </a:pPr>
             <a:r>
@@ -21999,7 +21785,7 @@
           </a:bodyPr>
           <a:lstStyle/>
           <a:p>
-            <a:pPr algn="l" indent="0" marL="0">
+            <a:pPr marL="0" indent="0" algn="l">
               <a:buNone/>
             </a:pPr>
             <a:r>
@@ -22318,4 +22104,265 @@
     </a:ext>
   </a:extLst>
 </a:theme>
+</file>
+
+<file path=ppt/theme/theme2.xml><?xml version="1.0" encoding="utf-8"?>
+<a:theme xmlns:a="http://schemas.openxmlformats.org/drawingml/2006/main" name="Office 佈景主題">
+  <a:themeElements>
+    <a:clrScheme name="Office">
+      <a:dk1>
+        <a:sysClr val="windowText" lastClr="000000"/>
+      </a:dk1>
+      <a:lt1>
+        <a:sysClr val="window" lastClr="FFFFFF"/>
+      </a:lt1>
+      <a:dk2>
+        <a:srgbClr val="44546A"/>
+      </a:dk2>
+      <a:lt2>
+        <a:srgbClr val="E7E6E6"/>
+      </a:lt2>
+      <a:accent1>
+        <a:srgbClr val="5B9BD5"/>
+      </a:accent1>
+      <a:accent2>
+        <a:srgbClr val="ED7D31"/>
+      </a:accent2>
+      <a:accent3>
+        <a:srgbClr val="A5A5A5"/>
+      </a:accent3>
+      <a:accent4>
+        <a:srgbClr val="FFC000"/>
+      </a:accent4>
+      <a:accent5>
+        <a:srgbClr val="4472C4"/>
+      </a:accent5>
+      <a:accent6>
+        <a:srgbClr val="70AD47"/>
+      </a:accent6>
+      <a:hlink>
+        <a:srgbClr val="0563C1"/>
+      </a:hlink>
+      <a:folHlink>
+        <a:srgbClr val="954F72"/>
+      </a:folHlink>
+    </a:clrScheme>
+    <a:fontScheme name="Office">
+      <a:majorFont>
+        <a:latin typeface="Calibri Light" panose="020F0302020204030204"/>
+        <a:ea typeface=""/>
+        <a:cs typeface=""/>
+        <a:font script="Jpan" typeface="游ゴシック Light"/>
+        <a:font script="Hang" typeface="맑은 고딕"/>
+        <a:font script="Hans" typeface="等线 Light"/>
+        <a:font script="Hant" typeface="新細明體"/>
+        <a:font script="Arab" typeface="Times New Roman"/>
+        <a:font script="Hebr" typeface="Times New Roman"/>
+        <a:font script="Thai" typeface="Angsana New"/>
+        <a:font script="Ethi" typeface="Nyala"/>
+        <a:font script="Beng" typeface="Vrinda"/>
+        <a:font script="Gujr" typeface="Shruti"/>
+        <a:font script="Khmr" typeface="MoolBoran"/>
+        <a:font script="Knda" typeface="Tunga"/>
+        <a:font script="Guru" typeface="Raavi"/>
+        <a:font script="Cans" typeface="Euphemia"/>
+        <a:font script="Cher" typeface="Plantagenet Cherokee"/>
+        <a:font script="Yiii" typeface="Microsoft Yi Baiti"/>
+        <a:font script="Tibt" typeface="Microsoft Himalaya"/>
+        <a:font script="Thaa" typeface="MV Boli"/>
+        <a:font script="Deva" typeface="Mangal"/>
+        <a:font script="Telu" typeface="Gautami"/>
+        <a:font script="Taml" typeface="Latha"/>
+        <a:font script="Syrc" typeface="Estrangelo Edessa"/>
+        <a:font script="Orya" typeface="Kalinga"/>
+        <a:font script="Mlym" typeface="Kartika"/>
+        <a:font script="Laoo" typeface="DokChampa"/>
+        <a:font script="Sinh" typeface="Iskoola Pota"/>
+        <a:font script="Mong" typeface="Mongolian Baiti"/>
+        <a:font script="Viet" typeface="Times New Roman"/>
+        <a:font script="Uigh" typeface="Microsoft Uighur"/>
+        <a:font script="Geor" typeface="Sylfaen"/>
+      </a:majorFont>
+      <a:minorFont>
+        <a:latin typeface="Calibri" panose="020F0502020204030204"/>
+        <a:ea typeface=""/>
+        <a:cs typeface=""/>
+        <a:font script="Jpan" typeface="游ゴシック"/>
+        <a:font script="Hang" typeface="맑은 고딕"/>
+        <a:font script="Hans" typeface="等线"/>
+        <a:font script="Hant" typeface="新細明體"/>
+        <a:font script="Arab" typeface="Arial"/>
+        <a:font script="Hebr" typeface="Arial"/>
+        <a:font script="Thai" typeface="Cordia New"/>
+        <a:font script="Ethi" typeface="Nyala"/>
+        <a:font script="Beng" typeface="Vrinda"/>
+        <a:font script="Gujr" typeface="Shruti"/>
+        <a:font script="Khmr" typeface="DaunPenh"/>
+        <a:font script="Knda" typeface="Tunga"/>
+        <a:font script="Guru" typeface="Raavi"/>
+        <a:font script="Cans" typeface="Euphemia"/>
+        <a:font script="Cher" typeface="Plantagenet Cherokee"/>
+        <a:font script="Yiii" typeface="Microsoft Yi Baiti"/>
+        <a:font script="Tibt" typeface="Microsoft Himalaya"/>
+        <a:font script="Thaa" typeface="MV Boli"/>
+        <a:font script="Deva" typeface="Mangal"/>
+        <a:font script="Telu" typeface="Gautami"/>
+        <a:font script="Taml" typeface="Latha"/>
+        <a:font script="Syrc" typeface="Estrangelo Edessa"/>
+        <a:font script="Orya" typeface="Kalinga"/>
+        <a:font script="Mlym" typeface="Kartika"/>
+        <a:font script="Laoo" typeface="DokChampa"/>
+        <a:font script="Sinh" typeface="Iskoola Pota"/>
+        <a:font script="Mong" typeface="Mongolian Baiti"/>
+        <a:font script="Viet" typeface="Arial"/>
+        <a:font script="Uigh" typeface="Microsoft Uighur"/>
+        <a:font script="Geor" typeface="Sylfaen"/>
+      </a:minorFont>
+    </a:fontScheme>
+    <a:fmtScheme name="Office">
+      <a:fillStyleLst>
+        <a:solidFill>
+          <a:schemeClr val="phClr"/>
+        </a:solidFill>
+        <a:gradFill rotWithShape="1">
+          <a:gsLst>
+            <a:gs pos="0">
+              <a:schemeClr val="phClr">
+                <a:lumMod val="110000"/>
+                <a:satMod val="105000"/>
+                <a:tint val="67000"/>
+              </a:schemeClr>
+            </a:gs>
+            <a:gs pos="50000">
+              <a:schemeClr val="phClr">
+                <a:lumMod val="105000"/>
+                <a:satMod val="103000"/>
+                <a:tint val="73000"/>
+              </a:schemeClr>
+            </a:gs>
+            <a:gs pos="100000">
+              <a:schemeClr val="phClr">
+                <a:lumMod val="105000"/>
+                <a:satMod val="109000"/>
+                <a:tint val="81000"/>
+              </a:schemeClr>
+            </a:gs>
+          </a:gsLst>
+          <a:lin ang="5400000" scaled="0"/>
+        </a:gradFill>
+        <a:gradFill rotWithShape="1">
+          <a:gsLst>
+            <a:gs pos="0">
+              <a:schemeClr val="phClr">
+                <a:satMod val="103000"/>
+                <a:lumMod val="102000"/>
+                <a:tint val="94000"/>
+              </a:schemeClr>
+            </a:gs>
+            <a:gs pos="50000">
+              <a:schemeClr val="phClr">
+                <a:satMod val="110000"/>
+                <a:lumMod val="100000"/>
+                <a:shade val="100000"/>
+              </a:schemeClr>
+            </a:gs>
+            <a:gs pos="100000">
+              <a:schemeClr val="phClr">
+                <a:lumMod val="99000"/>
+                <a:satMod val="120000"/>
+                <a:shade val="78000"/>
+              </a:schemeClr>
+            </a:gs>
+          </a:gsLst>
+          <a:lin ang="5400000" scaled="0"/>
+        </a:gradFill>
+      </a:fillStyleLst>
+      <a:lnStyleLst>
+        <a:ln w="6350" cap="flat" cmpd="sng" algn="ctr">
+          <a:solidFill>
+            <a:schemeClr val="phClr"/>
+          </a:solidFill>
+          <a:prstDash val="solid"/>
+          <a:miter lim="800000"/>
+        </a:ln>
+        <a:ln w="12700" cap="flat" cmpd="sng" algn="ctr">
+          <a:solidFill>
+            <a:schemeClr val="phClr"/>
+          </a:solidFill>
+          <a:prstDash val="solid"/>
+          <a:miter lim="800000"/>
+        </a:ln>
+        <a:ln w="19050" cap="flat" cmpd="sng" algn="ctr">
+          <a:solidFill>
+            <a:schemeClr val="phClr"/>
+          </a:solidFill>
+          <a:prstDash val="solid"/>
+          <a:miter lim="800000"/>
+        </a:ln>
+      </a:lnStyleLst>
+      <a:effectStyleLst>
+        <a:effectStyle>
+          <a:effectLst/>
+        </a:effectStyle>
+        <a:effectStyle>
+          <a:effectLst/>
+        </a:effectStyle>
+        <a:effectStyle>
+          <a:effectLst>
+            <a:outerShdw blurRad="57150" dist="19050" dir="5400000" algn="ctr" rotWithShape="0">
+              <a:srgbClr val="000000">
+                <a:alpha val="63000"/>
+              </a:srgbClr>
+            </a:outerShdw>
+          </a:effectLst>
+        </a:effectStyle>
+      </a:effectStyleLst>
+      <a:bgFillStyleLst>
+        <a:solidFill>
+          <a:schemeClr val="phClr"/>
+        </a:solidFill>
+        <a:solidFill>
+          <a:schemeClr val="phClr">
+            <a:tint val="95000"/>
+            <a:satMod val="170000"/>
+          </a:schemeClr>
+        </a:solidFill>
+        <a:gradFill rotWithShape="1">
+          <a:gsLst>
+            <a:gs pos="0">
+              <a:schemeClr val="phClr">
+                <a:tint val="93000"/>
+                <a:satMod val="150000"/>
+                <a:shade val="98000"/>
+                <a:lumMod val="102000"/>
+              </a:schemeClr>
+            </a:gs>
+            <a:gs pos="50000">
+              <a:schemeClr val="phClr">
+                <a:tint val="98000"/>
+                <a:satMod val="130000"/>
+                <a:shade val="90000"/>
+                <a:lumMod val="103000"/>
+              </a:schemeClr>
+            </a:gs>
+            <a:gs pos="100000">
+              <a:schemeClr val="phClr">
+                <a:shade val="63000"/>
+                <a:satMod val="120000"/>
+              </a:schemeClr>
+            </a:gs>
+          </a:gsLst>
+          <a:lin ang="5400000" scaled="0"/>
+        </a:gradFill>
+      </a:bgFillStyleLst>
+    </a:fmtScheme>
+  </a:themeElements>
+  <a:objectDefaults/>
+  <a:extraClrSchemeLst/>
+  <a:extLst>
+    <a:ext uri="{05A4C25C-085E-4340-85A3-A5531E510DB2}">
+      <thm15:themeFamily xmlns:thm15="http://schemas.microsoft.com/office/thememl/2012/main" name="Office Theme" id="{62F939B6-93AF-4DB8-9C6B-D6C7DFDC589F}" vid="{4A3C46E8-61CC-4603-A589-7422A47A8E4A}"/>
+    </a:ext>
+  </a:extLst>
+</a:theme>
 </file>